--- a/PPTs/L2 Intro to ML.pptx
+++ b/PPTs/L2 Intro to ML.pptx
@@ -276,7 +276,7 @@
           <a:p>
             <a:fld id="{A2B3DE59-F14A-BE48-A4BD-826E6AEB8CEC}" type="datetimeFigureOut">
               <a:rPr lang="en-US" smtClean="0"/>
-              <a:t>11/27/2023</a:t>
+              <a:t>9/10/2026</a:t>
             </a:fld>
             <a:endParaRPr lang="en-US"/>
           </a:p>
@@ -801,7 +801,7 @@
           <a:p>
             <a:fld id="{7077AFBB-1CF4-8544-90DC-1ED8B9AA61D3}" type="datetime1">
               <a:rPr lang="en-US" smtClean="0"/>
-              <a:t>11/27/2023</a:t>
+              <a:t>9/10/2026</a:t>
             </a:fld>
             <a:endParaRPr lang="en-US"/>
           </a:p>
@@ -999,7 +999,7 @@
           <a:p>
             <a:fld id="{1C00165F-9719-7745-8559-6A7EE2923027}" type="datetime1">
               <a:rPr lang="en-US" smtClean="0"/>
-              <a:t>11/27/2023</a:t>
+              <a:t>9/10/2026</a:t>
             </a:fld>
             <a:endParaRPr lang="en-US"/>
           </a:p>
@@ -1207,7 +1207,7 @@
           <a:p>
             <a:fld id="{4C6A8D55-FA0C-7D43-BAC0-BED15F1C12ED}" type="datetime1">
               <a:rPr lang="en-US" smtClean="0"/>
-              <a:t>11/27/2023</a:t>
+              <a:t>9/10/2026</a:t>
             </a:fld>
             <a:endParaRPr lang="en-US"/>
           </a:p>
@@ -1427,7 +1427,7 @@
           <a:p>
             <a:fld id="{7FA70553-0253-CE4B-B6C1-A630CB55C29D}" type="datetime1">
               <a:rPr lang="en-US" smtClean="0"/>
-              <a:t>11/27/2023</a:t>
+              <a:t>9/10/2026</a:t>
             </a:fld>
             <a:endParaRPr lang="en-US"/>
           </a:p>
@@ -1625,7 +1625,7 @@
           <a:p>
             <a:fld id="{105DE84E-69F4-FD40-ABD1-0EFAC22A12F3}" type="datetime1">
               <a:rPr lang="en-US" smtClean="0"/>
-              <a:t>11/27/2023</a:t>
+              <a:t>9/10/2026</a:t>
             </a:fld>
             <a:endParaRPr lang="en-US"/>
           </a:p>
@@ -1900,7 +1900,7 @@
           <a:p>
             <a:fld id="{10C0B3DB-0D9D-DD44-80C5-08109265E077}" type="datetime1">
               <a:rPr lang="en-US" smtClean="0"/>
-              <a:t>11/27/2023</a:t>
+              <a:t>9/10/2026</a:t>
             </a:fld>
             <a:endParaRPr lang="en-US"/>
           </a:p>
@@ -2165,7 +2165,7 @@
           <a:p>
             <a:fld id="{797EA869-A27D-C344-97D7-71199BBF260C}" type="datetime1">
               <a:rPr lang="en-US" smtClean="0"/>
-              <a:t>11/27/2023</a:t>
+              <a:t>9/10/2026</a:t>
             </a:fld>
             <a:endParaRPr lang="en-US"/>
           </a:p>
@@ -2577,7 +2577,7 @@
           <a:p>
             <a:fld id="{E7A15D25-E67F-1942-BBE6-90A232C6709A}" type="datetime1">
               <a:rPr lang="en-US" smtClean="0"/>
-              <a:t>11/27/2023</a:t>
+              <a:t>9/10/2026</a:t>
             </a:fld>
             <a:endParaRPr lang="en-US"/>
           </a:p>
@@ -2718,7 +2718,7 @@
           <a:p>
             <a:fld id="{CB2E0881-5289-1B49-8243-C7A7C2D761C1}" type="datetime1">
               <a:rPr lang="en-US" smtClean="0"/>
-              <a:t>11/27/2023</a:t>
+              <a:t>9/10/2026</a:t>
             </a:fld>
             <a:endParaRPr lang="en-US"/>
           </a:p>
@@ -2831,7 +2831,7 @@
           <a:p>
             <a:fld id="{BE289B97-0FAD-A54C-B1E0-81D6BDD23977}" type="datetime1">
               <a:rPr lang="en-US" smtClean="0"/>
-              <a:t>11/27/2023</a:t>
+              <a:t>9/10/2026</a:t>
             </a:fld>
             <a:endParaRPr lang="en-US"/>
           </a:p>
@@ -3142,7 +3142,7 @@
           <a:p>
             <a:fld id="{3CDAE13F-8788-6040-8DCF-36B10FE0117C}" type="datetime1">
               <a:rPr lang="en-US" smtClean="0"/>
-              <a:t>11/27/2023</a:t>
+              <a:t>9/10/2026</a:t>
             </a:fld>
             <a:endParaRPr lang="en-US"/>
           </a:p>
@@ -3355,7 +3355,7 @@
           <a:p>
             <a:fld id="{4553E244-3CAB-5240-928D-C4F781982911}" type="datetime1">
               <a:rPr lang="en-US" smtClean="0"/>
-              <a:t>11/27/2023</a:t>
+              <a:t>9/10/2026</a:t>
             </a:fld>
             <a:endParaRPr lang="en-US" dirty="0"/>
           </a:p>
@@ -3669,7 +3669,7 @@
           <a:p>
             <a:fld id="{8DA2BFAE-9CFE-3F4B-9BA6-76D3AD40298B}" type="datetime1">
               <a:rPr lang="en-US" smtClean="0"/>
-              <a:t>11/27/2023</a:t>
+              <a:t>9/10/2026</a:t>
             </a:fld>
             <a:endParaRPr lang="en-US"/>
           </a:p>
@@ -3867,7 +3867,7 @@
           <a:p>
             <a:fld id="{862BC747-2201-4149-89A6-B535544AC76E}" type="datetime1">
               <a:rPr lang="en-US" smtClean="0"/>
-              <a:t>11/27/2023</a:t>
+              <a:t>9/10/2026</a:t>
             </a:fld>
             <a:endParaRPr lang="en-US"/>
           </a:p>
@@ -4075,7 +4075,7 @@
           <a:p>
             <a:fld id="{2B6899FF-A9B6-EA4C-92F4-3B955917C48A}" type="datetime1">
               <a:rPr lang="en-US" smtClean="0"/>
-              <a:t>11/27/2023</a:t>
+              <a:t>9/10/2026</a:t>
             </a:fld>
             <a:endParaRPr lang="en-US"/>
           </a:p>
@@ -4350,7 +4350,7 @@
           <a:p>
             <a:fld id="{E433CC24-15E2-8440-82CF-DFE60D570E43}" type="datetime1">
               <a:rPr lang="en-US" smtClean="0"/>
-              <a:t>11/27/2023</a:t>
+              <a:t>9/10/2026</a:t>
             </a:fld>
             <a:endParaRPr lang="en-US"/>
           </a:p>
@@ -4615,7 +4615,7 @@
           <a:p>
             <a:fld id="{8DFE6C63-9089-6A49-BC6E-454A735346DF}" type="datetime1">
               <a:rPr lang="en-US" smtClean="0"/>
-              <a:t>11/27/2023</a:t>
+              <a:t>9/10/2026</a:t>
             </a:fld>
             <a:endParaRPr lang="en-US"/>
           </a:p>
@@ -5027,7 +5027,7 @@
           <a:p>
             <a:fld id="{3577C773-47BC-AB4F-9BFA-AB3DE15F2F0E}" type="datetime1">
               <a:rPr lang="en-US" smtClean="0"/>
-              <a:t>11/27/2023</a:t>
+              <a:t>9/10/2026</a:t>
             </a:fld>
             <a:endParaRPr lang="en-US"/>
           </a:p>
@@ -5168,7 +5168,7 @@
           <a:p>
             <a:fld id="{C5911242-D6ED-7442-B4D5-571BA5F763EC}" type="datetime1">
               <a:rPr lang="en-US" smtClean="0"/>
-              <a:t>11/27/2023</a:t>
+              <a:t>9/10/2026</a:t>
             </a:fld>
             <a:endParaRPr lang="en-US"/>
           </a:p>
@@ -5281,7 +5281,7 @@
           <a:p>
             <a:fld id="{53D49004-9440-C34D-AFCF-72D617EF0844}" type="datetime1">
               <a:rPr lang="en-US" smtClean="0"/>
-              <a:t>11/27/2023</a:t>
+              <a:t>9/10/2026</a:t>
             </a:fld>
             <a:endParaRPr lang="en-US"/>
           </a:p>
@@ -5592,7 +5592,7 @@
           <a:p>
             <a:fld id="{6CEC9C39-AF37-7048-A5F3-2138FC4EBAA9}" type="datetime1">
               <a:rPr lang="en-US" smtClean="0"/>
-              <a:t>11/27/2023</a:t>
+              <a:t>9/10/2026</a:t>
             </a:fld>
             <a:endParaRPr lang="en-US"/>
           </a:p>
@@ -5880,7 +5880,7 @@
           <a:p>
             <a:fld id="{8F9F80C6-6E15-BC44-A547-629E68A1897C}" type="datetime1">
               <a:rPr lang="en-US" smtClean="0"/>
-              <a:t>11/27/2023</a:t>
+              <a:t>9/10/2026</a:t>
             </a:fld>
             <a:endParaRPr lang="en-US"/>
           </a:p>
@@ -6121,7 +6121,7 @@
           <a:p>
             <a:fld id="{B1484145-EBBF-4546-953A-FE89B9B40A32}" type="datetime1">
               <a:rPr lang="en-US" smtClean="0"/>
-              <a:t>11/27/2023</a:t>
+              <a:t>9/10/2026</a:t>
             </a:fld>
             <a:endParaRPr lang="en-US"/>
           </a:p>
@@ -6809,7 +6809,7 @@
           <a:p>
             <a:fld id="{35187CD5-43F5-7F4F-8DF9-F56AF4D056AA}" type="datetime1">
               <a:rPr lang="en-US" smtClean="0"/>
-              <a:t>11/27/2023</a:t>
+              <a:t>9/10/2026</a:t>
             </a:fld>
             <a:endParaRPr lang="en-US"/>
           </a:p>
@@ -7698,16 +7698,23 @@
           </a:lstStyle>
           <a:p>
             <a:r>
-              <a:rPr lang="en-US"/>
-              <a:t>Zonghua Gu, Umeå University</a:t>
+              <a:rPr lang="en-US" dirty="0"/>
+              <a:t>Zonghua Gu</a:t>
             </a:r>
           </a:p>
           <a:p>
+            <a:r>
+              <a:rPr lang="en-US" altLang="zh-CN"/>
+              <a:t>Fall</a:t>
+            </a:r>
             <a:r>
               <a:rPr lang="en-US"/>
-              <a:t>Nov. 2023</a:t>
+              <a:t> </a:t>
             </a:r>
-            <a:endParaRPr lang="en-US" dirty="0"/>
+            <a:r>
+              <a:rPr lang="en-US" dirty="0"/>
+              <a:t>2026</a:t>
+            </a:r>
           </a:p>
         </p:txBody>
       </p:sp>
@@ -8104,7 +8111,7 @@
                     <m:sSub>
                       <m:sSubPr>
                         <m:ctrlPr>
-                          <a:rPr lang="en-US" i="1" smtClean="0">
+                          <a:rPr lang="en-US" i="1">
                             <a:latin typeface="Cambria Math" panose="02040503050406030204" pitchFamily="18" charset="0"/>
                           </a:rPr>
                         </m:ctrlPr>
@@ -8114,7 +8121,7 @@
                           <a:rPr lang="en-US" i="1">
                             <a:latin typeface="Cambria Math" panose="02040503050406030204" pitchFamily="18" charset="0"/>
                           </a:rPr>
-                          <m:t>h</m:t>
+                          <m:t>ℎ</m:t>
                         </m:r>
                       </m:e>
                       <m:sub>
@@ -8204,7 +8211,7 @@
                           <a:rPr lang="en-US" i="1">
                             <a:latin typeface="Cambria Math" panose="02040503050406030204" pitchFamily="18" charset="0"/>
                           </a:rPr>
-                          <m:t>h</m:t>
+                          <m:t>ℎ</m:t>
                         </m:r>
                       </m:e>
                       <m:sub>
@@ -8349,7 +8356,7 @@
                           <a:rPr lang="en-US" i="1">
                             <a:latin typeface="Cambria Math" panose="02040503050406030204" pitchFamily="18" charset="0"/>
                           </a:rPr>
-                          <m:t>h</m:t>
+                          <m:t>ℎ</m:t>
                         </m:r>
                       </m:e>
                       <m:sub>
@@ -8389,7 +8396,7 @@
                     <m:sSub>
                       <m:sSubPr>
                         <m:ctrlPr>
-                          <a:rPr lang="en-US" i="1" smtClean="0">
+                          <a:rPr lang="en-US" i="1">
                             <a:latin typeface="Cambria Math" panose="02040503050406030204" pitchFamily="18" charset="0"/>
                           </a:rPr>
                         </m:ctrlPr>
@@ -8399,7 +8406,7 @@
                           <a:rPr lang="en-US" i="1">
                             <a:latin typeface="Cambria Math" panose="02040503050406030204" pitchFamily="18" charset="0"/>
                           </a:rPr>
-                          <m:t>h</m:t>
+                          <m:t>ℎ</m:t>
                         </m:r>
                       </m:e>
                       <m:sub>
@@ -8462,7 +8469,7 @@
                     <m:func>
                       <m:funcPr>
                         <m:ctrlPr>
-                          <a:rPr lang="en-US" b="0" i="1" smtClean="0">
+                          <a:rPr lang="en-US" b="0" i="0" smtClean="0">
                             <a:latin typeface="Cambria Math" panose="02040503050406030204" pitchFamily="18" charset="0"/>
                           </a:rPr>
                         </m:ctrlPr>
@@ -8513,7 +8520,7 @@
                         <m:func>
                           <m:funcPr>
                             <m:ctrlPr>
-                              <a:rPr lang="en-US" b="0" i="1" smtClean="0">
+                              <a:rPr lang="en-US" b="0" i="0" smtClean="0">
                                 <a:latin typeface="Cambria Math" panose="02040503050406030204" pitchFamily="18" charset="0"/>
                               </a:rPr>
                             </m:ctrlPr>
@@ -9126,7 +9133,7 @@
                         <m:func>
                           <m:funcPr>
                             <m:ctrlPr>
-                              <a:rPr lang="en-US" b="0" i="1" smtClean="0">
+                              <a:rPr lang="en-US" b="0" i="0" smtClean="0">
                                 <a:latin typeface="Cambria Math" panose="02040503050406030204" pitchFamily="18" charset="0"/>
                               </a:rPr>
                             </m:ctrlPr>
@@ -9222,7 +9229,7 @@
                             <m:func>
                               <m:funcPr>
                                 <m:ctrlPr>
-                                  <a:rPr lang="en-US" i="1" smtClean="0">
+                                  <a:rPr lang="en-US">
                                     <a:latin typeface="Cambria Math" panose="02040503050406030204" pitchFamily="18" charset="0"/>
                                   </a:rPr>
                                 </m:ctrlPr>
@@ -9374,7 +9381,7 @@
                     <m:func>
                       <m:funcPr>
                         <m:ctrlPr>
-                          <a:rPr lang="en-US" b="0" i="1" smtClean="0">
+                          <a:rPr lang="en-US" b="0" i="0" smtClean="0">
                             <a:latin typeface="Cambria Math" panose="02040503050406030204" pitchFamily="18" charset="0"/>
                           </a:rPr>
                         </m:ctrlPr>
@@ -9428,7 +9435,7 @@
                                       <a:rPr lang="en-US" b="0" i="1" smtClean="0">
                                         <a:latin typeface="Cambria Math" panose="02040503050406030204" pitchFamily="18" charset="0"/>
                                       </a:rPr>
-                                      <m:t>h</m:t>
+                                      <m:t>ℎ</m:t>
                                     </m:r>
                                   </m:e>
                                   <m:sub>
@@ -9486,7 +9493,7 @@
                     <m:func>
                       <m:funcPr>
                         <m:ctrlPr>
-                          <a:rPr lang="en-US" i="1">
+                          <a:rPr lang="en-US">
                             <a:latin typeface="Cambria Math" panose="02040503050406030204" pitchFamily="18" charset="0"/>
                           </a:rPr>
                         </m:ctrlPr>
@@ -9524,7 +9531,7 @@
                                 <m:func>
                                   <m:funcPr>
                                     <m:ctrlPr>
-                                      <a:rPr lang="en-US" i="1">
+                                      <a:rPr lang="en-US">
                                         <a:latin typeface="Cambria Math" panose="02040503050406030204" pitchFamily="18" charset="0"/>
                                       </a:rPr>
                                     </m:ctrlPr>
@@ -9563,7 +9570,7 @@
                                               <a:rPr lang="en-US" i="1">
                                                 <a:latin typeface="Cambria Math" panose="02040503050406030204" pitchFamily="18" charset="0"/>
                                               </a:rPr>
-                                              <m:t>h</m:t>
+                                              <m:t>ℎ</m:t>
                                             </m:r>
                                           </m:e>
                                           <m:sub>
@@ -9656,7 +9663,7 @@
                                     <m:func>
                                       <m:funcPr>
                                         <m:ctrlPr>
-                                          <a:rPr lang="en-US" i="1">
+                                          <a:rPr lang="en-US">
                                             <a:latin typeface="Cambria Math" panose="02040503050406030204" pitchFamily="18" charset="0"/>
                                           </a:rPr>
                                         </m:ctrlPr>
@@ -9695,7 +9702,7 @@
                                                   <a:rPr lang="en-US" i="1">
                                                     <a:latin typeface="Cambria Math" panose="02040503050406030204" pitchFamily="18" charset="0"/>
                                                   </a:rPr>
-                                                  <m:t>h</m:t>
+                                                  <m:t>ℎ</m:t>
                                                 </m:r>
                                               </m:e>
                                               <m:sub>
@@ -9764,7 +9771,7 @@
                     <m:func>
                       <m:funcPr>
                         <m:ctrlPr>
-                          <a:rPr lang="en-US" i="1">
+                          <a:rPr lang="en-US">
                             <a:latin typeface="Cambria Math" panose="02040503050406030204" pitchFamily="18" charset="0"/>
                           </a:rPr>
                         </m:ctrlPr>
@@ -9784,7 +9791,7 @@
                         <m:d>
                           <m:dPr>
                             <m:ctrlPr>
-                              <a:rPr lang="en-US" i="1">
+                              <a:rPr lang="en-US" i="1" smtClean="0">
                                 <a:latin typeface="Cambria Math" panose="02040503050406030204" pitchFamily="18" charset="0"/>
                               </a:rPr>
                             </m:ctrlPr>
@@ -9795,7 +9802,7 @@
                                 <m:chr m:val="∑"/>
                                 <m:limLoc m:val="subSup"/>
                                 <m:ctrlPr>
-                                  <a:rPr lang="en-US" i="1" smtClean="0">
+                                  <a:rPr lang="en-US" i="1">
                                     <a:latin typeface="Cambria Math" panose="02040503050406030204" pitchFamily="18" charset="0"/>
                                   </a:rPr>
                                 </m:ctrlPr>
@@ -9829,7 +9836,7 @@
                                 <m:func>
                                   <m:funcPr>
                                     <m:ctrlPr>
-                                      <a:rPr lang="en-US" i="1">
+                                      <a:rPr lang="en-US">
                                         <a:latin typeface="Cambria Math" panose="02040503050406030204" pitchFamily="18" charset="0"/>
                                       </a:rPr>
                                     </m:ctrlPr>
@@ -9868,7 +9875,7 @@
                                               <a:rPr lang="en-US" i="1">
                                                 <a:latin typeface="Cambria Math" panose="02040503050406030204" pitchFamily="18" charset="0"/>
                                               </a:rPr>
-                                              <m:t>h</m:t>
+                                              <m:t>ℎ</m:t>
                                             </m:r>
                                           </m:e>
                                           <m:sub>
@@ -9945,7 +9952,7 @@
                           <a:rPr lang="en-US" i="1">
                             <a:latin typeface="Cambria Math" panose="02040503050406030204" pitchFamily="18" charset="0"/>
                           </a:rPr>
-                          <m:t>h</m:t>
+                          <m:t>ℎ</m:t>
                         </m:r>
                       </m:e>
                       <m:sub>
@@ -10017,7 +10024,7 @@
                     <m:d>
                       <m:dPr>
                         <m:ctrlPr>
-                          <a:rPr lang="en-US" b="0" i="1" smtClean="0">
+                          <a:rPr lang="en-US" i="1">
                             <a:latin typeface="Cambria Math" panose="02040503050406030204" pitchFamily="18" charset="0"/>
                           </a:rPr>
                         </m:ctrlPr>
@@ -10036,7 +10043,7 @@
                               <a:rPr lang="en-US" i="1">
                                 <a:latin typeface="Cambria Math" panose="02040503050406030204" pitchFamily="18" charset="0"/>
                               </a:rPr>
-                              <m:t>h</m:t>
+                              <m:t>ℎ</m:t>
                             </m:r>
                           </m:e>
                           <m:sub>
@@ -10118,7 +10125,7 @@
                                   <a:rPr lang="en-US" i="1">
                                     <a:latin typeface="Cambria Math" panose="02040503050406030204" pitchFamily="18" charset="0"/>
                                   </a:rPr>
-                                  <m:t>h</m:t>
+                                  <m:t>ℎ</m:t>
                                 </m:r>
                               </m:e>
                               <m:sub>
@@ -10518,7 +10525,7 @@
                     <m:sSub>
                       <m:sSubPr>
                         <m:ctrlPr>
-                          <a:rPr lang="en-US" i="1" smtClean="0">
+                          <a:rPr lang="en-US" i="1">
                             <a:latin typeface="Cambria Math" panose="02040503050406030204" pitchFamily="18" charset="0"/>
                           </a:rPr>
                         </m:ctrlPr>
@@ -10528,7 +10535,7 @@
                           <a:rPr lang="en-US" i="1">
                             <a:latin typeface="Cambria Math" panose="02040503050406030204" pitchFamily="18" charset="0"/>
                           </a:rPr>
-                          <m:t>h</m:t>
+                          <m:t>ℎ</m:t>
                         </m:r>
                       </m:e>
                       <m:sub>
@@ -10543,7 +10550,7 @@
                     <m:d>
                       <m:dPr>
                         <m:ctrlPr>
-                          <a:rPr lang="en-US" i="1">
+                          <a:rPr lang="en-US" b="0" i="1" smtClean="0">
                             <a:latin typeface="Cambria Math" panose="02040503050406030204" pitchFamily="18" charset="0"/>
                           </a:rPr>
                         </m:ctrlPr>
@@ -10572,7 +10579,7 @@
                     <m:sSub>
                       <m:sSubPr>
                         <m:ctrlPr>
-                          <a:rPr lang="en-US" b="0" i="1" smtClean="0">
+                          <a:rPr lang="en-US" i="1">
                             <a:latin typeface="Cambria Math" panose="02040503050406030204" pitchFamily="18" charset="0"/>
                           </a:rPr>
                         </m:ctrlPr>
@@ -10626,7 +10633,7 @@
                             <m:begChr m:val="["/>
                             <m:endChr m:val="]"/>
                             <m:ctrlPr>
-                              <a:rPr lang="en-US" b="0" i="1" smtClean="0">
+                              <a:rPr lang="en-US" i="1">
                                 <a:latin typeface="Cambria Math" panose="02040503050406030204" pitchFamily="18" charset="0"/>
                               </a:rPr>
                             </m:ctrlPr>
@@ -10721,7 +10728,7 @@
                     <m:sSub>
                       <m:sSubPr>
                         <m:ctrlPr>
-                          <a:rPr lang="en-US" b="0" i="1" smtClean="0">
+                          <a:rPr lang="en-US" i="1">
                             <a:latin typeface="Cambria Math" panose="02040503050406030204" pitchFamily="18" charset="0"/>
                           </a:rPr>
                         </m:ctrlPr>
@@ -10771,7 +10778,7 @@
                             <m:begChr m:val="["/>
                             <m:endChr m:val="]"/>
                             <m:ctrlPr>
-                              <a:rPr lang="en-US" b="0" i="1" smtClean="0">
+                              <a:rPr lang="en-US" i="1">
                                 <a:latin typeface="Cambria Math" panose="02040503050406030204" pitchFamily="18" charset="0"/>
                               </a:rPr>
                             </m:ctrlPr>
@@ -10857,7 +10864,7 @@
                             <m:begChr m:val="["/>
                             <m:endChr m:val="]"/>
                             <m:ctrlPr>
-                              <a:rPr lang="en-US" i="1">
+                              <a:rPr lang="en-US" i="1" smtClean="0">
                                 <a:latin typeface="Cambria Math" panose="02040503050406030204" pitchFamily="18" charset="0"/>
                               </a:rPr>
                             </m:ctrlPr>
@@ -10938,7 +10945,7 @@
                     <m:func>
                       <m:funcPr>
                         <m:ctrlPr>
-                          <a:rPr lang="en-US" b="0" i="1" smtClean="0">
+                          <a:rPr lang="en-US" b="0" i="0" smtClean="0">
                             <a:solidFill>
                               <a:srgbClr val="C00000"/>
                             </a:solidFill>
@@ -12138,10 +12145,7 @@
                 <a:pPr/>
                 <a14:m>
                   <m:oMathPara xmlns:m="http://schemas.openxmlformats.org/officeDocument/2006/math">
-                    <m:oMathParaPr>
-                      <m:jc m:val="centerGroup"/>
-                    </m:oMathParaPr>
-                    <m:oMath xmlns:m="http://schemas.openxmlformats.org/officeDocument/2006/math">
+                    <m:oMath>
                       <m:r>
                         <a:rPr lang="en-US" sz="1600" b="0" i="1" dirty="0" smtClean="0">
                           <a:latin typeface="Cambria Math" panose="02040503050406030204" pitchFamily="18" charset="0"/>
@@ -12180,10 +12184,7 @@
                 <a:pPr/>
                 <a14:m>
                   <m:oMathPara xmlns:m="http://schemas.openxmlformats.org/officeDocument/2006/math">
-                    <m:oMathParaPr>
-                      <m:jc m:val="centerGroup"/>
-                    </m:oMathParaPr>
-                    <m:oMath xmlns:m="http://schemas.openxmlformats.org/officeDocument/2006/math">
+                    <m:oMath>
                       <m:r>
                         <a:rPr lang="en-US" sz="1600" b="0" i="1" dirty="0" smtClean="0">
                           <a:latin typeface="Cambria Math" panose="02040503050406030204" pitchFamily="18" charset="0"/>
@@ -12222,10 +12223,7 @@
                 <a:pPr/>
                 <a14:m>
                   <m:oMathPara xmlns:m="http://schemas.openxmlformats.org/officeDocument/2006/math">
-                    <m:oMathParaPr>
-                      <m:jc m:val="centerGroup"/>
-                    </m:oMathParaPr>
-                    <m:oMath xmlns:m="http://schemas.openxmlformats.org/officeDocument/2006/math">
+                    <m:oMath>
                       <m:r>
                         <a:rPr lang="en-US" sz="1600" b="0" i="1" dirty="0" smtClean="0">
                           <a:latin typeface="Cambria Math" panose="02040503050406030204" pitchFamily="18" charset="0"/>
@@ -12264,10 +12262,7 @@
                 <a:pPr/>
                 <a14:m>
                   <m:oMathPara xmlns:m="http://schemas.openxmlformats.org/officeDocument/2006/math">
-                    <m:oMathParaPr>
-                      <m:jc m:val="centerGroup"/>
-                    </m:oMathParaPr>
-                    <m:oMath xmlns:m="http://schemas.openxmlformats.org/officeDocument/2006/math">
+                    <m:oMath>
                       <m:r>
                         <a:rPr lang="en-US" sz="1600" b="0" i="1" dirty="0" smtClean="0">
                           <a:latin typeface="Cambria Math" panose="02040503050406030204" pitchFamily="18" charset="0"/>
@@ -12306,10 +12301,7 @@
                 <a:pPr/>
                 <a14:m>
                   <m:oMathPara xmlns:m="http://schemas.openxmlformats.org/officeDocument/2006/math">
-                    <m:oMathParaPr>
-                      <m:jc m:val="centerGroup"/>
-                    </m:oMathParaPr>
-                    <m:oMath xmlns:m="http://schemas.openxmlformats.org/officeDocument/2006/math">
+                    <m:oMath>
                       <m:r>
                         <a:rPr lang="en-US" sz="1600" b="0" i="1" dirty="0" smtClean="0">
                           <a:latin typeface="Cambria Math" panose="02040503050406030204" pitchFamily="18" charset="0"/>
@@ -12348,10 +12340,7 @@
                 <a:pPr/>
                 <a14:m>
                   <m:oMathPara xmlns:m="http://schemas.openxmlformats.org/officeDocument/2006/math">
-                    <m:oMathParaPr>
-                      <m:jc m:val="centerGroup"/>
-                    </m:oMathParaPr>
-                    <m:oMath xmlns:m="http://schemas.openxmlformats.org/officeDocument/2006/math">
+                    <m:oMath>
                       <m:r>
                         <a:rPr lang="en-US" sz="1600" b="0" i="1" dirty="0" smtClean="0">
                           <a:latin typeface="Cambria Math" panose="02040503050406030204" pitchFamily="18" charset="0"/>
@@ -12390,10 +12379,7 @@
                 <a:pPr/>
                 <a14:m>
                   <m:oMathPara xmlns:m="http://schemas.openxmlformats.org/officeDocument/2006/math">
-                    <m:oMathParaPr>
-                      <m:jc m:val="centerGroup"/>
-                    </m:oMathParaPr>
-                    <m:oMath xmlns:m="http://schemas.openxmlformats.org/officeDocument/2006/math">
+                    <m:oMath>
                       <m:r>
                         <a:rPr lang="en-US" sz="1600" b="0" i="1" dirty="0" smtClean="0">
                           <a:latin typeface="Cambria Math" panose="02040503050406030204" pitchFamily="18" charset="0"/>
@@ -12432,10 +12418,7 @@
                 <a:pPr/>
                 <a14:m>
                   <m:oMathPara xmlns:m="http://schemas.openxmlformats.org/officeDocument/2006/math">
-                    <m:oMathParaPr>
-                      <m:jc m:val="centerGroup"/>
-                    </m:oMathParaPr>
-                    <m:oMath xmlns:m="http://schemas.openxmlformats.org/officeDocument/2006/math">
+                    <m:oMath>
                       <m:r>
                         <a:rPr lang="en-US" sz="1600" b="0" i="1" dirty="0" smtClean="0">
                           <a:latin typeface="Cambria Math" panose="02040503050406030204" pitchFamily="18" charset="0"/>
@@ -12474,10 +12457,7 @@
                 <a:pPr/>
                 <a14:m>
                   <m:oMathPara xmlns:m="http://schemas.openxmlformats.org/officeDocument/2006/math">
-                    <m:oMathParaPr>
-                      <m:jc m:val="centerGroup"/>
-                    </m:oMathParaPr>
-                    <m:oMath xmlns:m="http://schemas.openxmlformats.org/officeDocument/2006/math">
+                    <m:oMath>
                       <m:r>
                         <a:rPr lang="en-US" sz="1600" b="0" i="1" dirty="0" smtClean="0">
                           <a:solidFill>
@@ -12532,10 +12512,7 @@
                 <a:pPr/>
                 <a14:m>
                   <m:oMathPara xmlns:m="http://schemas.openxmlformats.org/officeDocument/2006/math">
-                    <m:oMathParaPr>
-                      <m:jc m:val="centerGroup"/>
-                    </m:oMathParaPr>
-                    <m:oMath xmlns:m="http://schemas.openxmlformats.org/officeDocument/2006/math">
+                    <m:oMath>
                       <m:r>
                         <a:rPr lang="en-US" sz="1600" b="0" i="1" dirty="0" smtClean="0">
                           <a:latin typeface="Cambria Math" panose="02040503050406030204" pitchFamily="18" charset="0"/>
@@ -13363,7 +13340,7 @@
                     <m:f>
                       <m:fPr>
                         <m:ctrlPr>
-                          <a:rPr lang="en-US" sz="1800" b="0" i="1" smtClean="0">
+                          <a:rPr lang="en-US" sz="1800" i="1">
                             <a:latin typeface="Cambria Math" panose="02040503050406030204" pitchFamily="18" charset="0"/>
                           </a:rPr>
                         </m:ctrlPr>
@@ -13553,8 +13530,8 @@
           </a:p>
         </p:txBody>
       </p:sp>
-      <mc:AlternateContent xmlns:mc="http://schemas.openxmlformats.org/markup-compatibility/2006">
-        <mc:Choice xmlns:a14="http://schemas.microsoft.com/office/drawing/2010/main" Requires="a14">
+      <mc:AlternateContent xmlns:mc="http://schemas.openxmlformats.org/markup-compatibility/2006" xmlns:a14="http://schemas.microsoft.com/office/drawing/2010/main">
+        <mc:Choice Requires="a14">
           <p:sp>
             <p:nvSpPr>
               <p:cNvPr id="3" name="Content Placeholder 2">
@@ -13592,7 +13569,7 @@
                     <m:f>
                       <m:fPr>
                         <m:ctrlPr>
-                          <a:rPr lang="en-US" sz="3200" b="0" i="1" smtClean="0">
+                          <a:rPr lang="en-US" sz="3200" i="1">
                             <a:latin typeface="Cambria Math" panose="02040503050406030204" pitchFamily="18" charset="0"/>
                           </a:rPr>
                         </m:ctrlPr>
@@ -13684,7 +13661,7 @@
                     <m:f>
                       <m:fPr>
                         <m:ctrlPr>
-                          <a:rPr lang="en-US" sz="3200" b="0" i="1" smtClean="0">
+                          <a:rPr lang="en-US" sz="3200" i="1">
                             <a:latin typeface="Cambria Math" panose="02040503050406030204" pitchFamily="18" charset="0"/>
                           </a:rPr>
                         </m:ctrlPr>
@@ -13784,7 +13761,7 @@
                     <m:f>
                       <m:fPr>
                         <m:ctrlPr>
-                          <a:rPr lang="en-US" i="1">
+                          <a:rPr lang="en-US" i="0">
                             <a:latin typeface="Cambria Math" panose="02040503050406030204" pitchFamily="18" charset="0"/>
                           </a:rPr>
                         </m:ctrlPr>
@@ -13819,7 +13796,7 @@
                         <m:d>
                           <m:dPr>
                             <m:ctrlPr>
-                              <a:rPr lang="en-US" b="0" i="1" smtClean="0">
+                              <a:rPr lang="en-US" i="0">
                                 <a:latin typeface="Cambria Math" panose="02040503050406030204" pitchFamily="18" charset="0"/>
                               </a:rPr>
                             </m:ctrlPr>
@@ -13862,7 +13839,7 @@
                     <m:f>
                       <m:fPr>
                         <m:ctrlPr>
-                          <a:rPr lang="en-US" b="0" i="1" smtClean="0">
+                          <a:rPr lang="en-US" i="1">
                             <a:latin typeface="Cambria Math" panose="02040503050406030204" pitchFamily="18" charset="0"/>
                           </a:rPr>
                         </m:ctrlPr>
@@ -14008,7 +13985,7 @@
                     <m:f>
                       <m:fPr>
                         <m:ctrlPr>
-                          <a:rPr lang="en-US" sz="3200" b="0" i="1" smtClean="0">
+                          <a:rPr lang="en-US" sz="3200" i="1">
                             <a:latin typeface="Cambria Math" panose="02040503050406030204" pitchFamily="18" charset="0"/>
                           </a:rPr>
                         </m:ctrlPr>
@@ -14149,7 +14126,7 @@
             </p:txBody>
           </p:sp>
         </mc:Choice>
-        <mc:Fallback>
+        <mc:Fallback xmlns="">
           <p:sp>
             <p:nvSpPr>
               <p:cNvPr id="3" name="Content Placeholder 2">
@@ -14718,7 +14695,7 @@
                     <m:f>
                       <m:fPr>
                         <m:ctrlPr>
-                          <a:rPr lang="en-US" i="1" kern="0" smtClean="0">
+                          <a:rPr lang="en-US" i="1" kern="0">
                             <a:latin typeface="Cambria Math" panose="02040503050406030204" pitchFamily="18" charset="0"/>
                           </a:rPr>
                         </m:ctrlPr>
@@ -14807,7 +14784,7 @@
                     <m:f>
                       <m:fPr>
                         <m:ctrlPr>
-                          <a:rPr lang="en-US" i="1" kern="0" smtClean="0">
+                          <a:rPr lang="en-US" i="1" kern="0">
                             <a:latin typeface="Cambria Math" panose="02040503050406030204" pitchFamily="18" charset="0"/>
                           </a:rPr>
                         </m:ctrlPr>
@@ -15003,7 +14980,7 @@
                     <m:f>
                       <m:fPr>
                         <m:ctrlPr>
-                          <a:rPr lang="en-US" i="1" kern="0" smtClean="0">
+                          <a:rPr lang="en-US" i="1" kern="0">
                             <a:latin typeface="Cambria Math" panose="02040503050406030204" pitchFamily="18" charset="0"/>
                           </a:rPr>
                         </m:ctrlPr>
@@ -19402,7 +19379,7 @@
                     <m:f>
                       <m:fPr>
                         <m:ctrlPr>
-                          <a:rPr lang="en-US" b="1" i="1" smtClean="0">
+                          <a:rPr lang="en-US" b="0" i="1" smtClean="0">
                             <a:latin typeface="Cambria Math" panose="02040503050406030204" pitchFamily="18" charset="0"/>
                           </a:rPr>
                         </m:ctrlPr>
@@ -19448,7 +19425,7 @@
                     <m:f>
                       <m:fPr>
                         <m:ctrlPr>
-                          <a:rPr lang="en-US" b="1" i="1">
+                          <a:rPr lang="en-US" i="1">
                             <a:latin typeface="Cambria Math" panose="02040503050406030204" pitchFamily="18" charset="0"/>
                           </a:rPr>
                         </m:ctrlPr>
@@ -19488,7 +19465,7 @@
                     <m:f>
                       <m:fPr>
                         <m:ctrlPr>
-                          <a:rPr lang="en-US" b="1" i="1">
+                          <a:rPr lang="en-US" i="1">
                             <a:latin typeface="Cambria Math" panose="02040503050406030204" pitchFamily="18" charset="0"/>
                           </a:rPr>
                         </m:ctrlPr>
@@ -19531,7 +19508,7 @@
                     <m:f>
                       <m:fPr>
                         <m:ctrlPr>
-                          <a:rPr lang="en-US" b="1" i="1">
+                          <a:rPr lang="en-US" i="1">
                             <a:latin typeface="Cambria Math" panose="02040503050406030204" pitchFamily="18" charset="0"/>
                           </a:rPr>
                         </m:ctrlPr>
@@ -19577,7 +19554,7 @@
                     <m:f>
                       <m:fPr>
                         <m:ctrlPr>
-                          <a:rPr lang="en-US" b="1" i="1">
+                          <a:rPr lang="en-US" i="1">
                             <a:latin typeface="Cambria Math" panose="02040503050406030204" pitchFamily="18" charset="0"/>
                           </a:rPr>
                         </m:ctrlPr>
@@ -19617,7 +19594,7 @@
                     <m:f>
                       <m:fPr>
                         <m:ctrlPr>
-                          <a:rPr lang="en-US" b="1" i="1">
+                          <a:rPr lang="en-US" i="1">
                             <a:latin typeface="Cambria Math" panose="02040503050406030204" pitchFamily="18" charset="0"/>
                           </a:rPr>
                         </m:ctrlPr>
@@ -19660,7 +19637,7 @@
                     <m:f>
                       <m:fPr>
                         <m:ctrlPr>
-                          <a:rPr lang="en-US" b="1" i="1">
+                          <a:rPr lang="en-US" i="1">
                             <a:latin typeface="Cambria Math" panose="02040503050406030204" pitchFamily="18" charset="0"/>
                           </a:rPr>
                         </m:ctrlPr>
@@ -19706,7 +19683,7 @@
                     <m:f>
                       <m:fPr>
                         <m:ctrlPr>
-                          <a:rPr lang="en-US" b="1" i="1">
+                          <a:rPr lang="en-US" i="1">
                             <a:latin typeface="Cambria Math" panose="02040503050406030204" pitchFamily="18" charset="0"/>
                           </a:rPr>
                         </m:ctrlPr>
@@ -19746,7 +19723,7 @@
                     <m:f>
                       <m:fPr>
                         <m:ctrlPr>
-                          <a:rPr lang="en-US" b="1" i="1">
+                          <a:rPr lang="en-US" i="1">
                             <a:latin typeface="Cambria Math" panose="02040503050406030204" pitchFamily="18" charset="0"/>
                           </a:rPr>
                         </m:ctrlPr>
@@ -20476,10 +20453,7 @@
                   <a:pPr algn="l"/>
                   <a14:m>
                     <m:oMathPara xmlns:m="http://schemas.openxmlformats.org/officeDocument/2006/math">
-                      <m:oMathParaPr>
-                        <m:jc m:val="centerGroup"/>
-                      </m:oMathParaPr>
-                      <m:oMath xmlns:m="http://schemas.openxmlformats.org/officeDocument/2006/math">
+                      <m:oMath>
                         <m:r>
                           <a:rPr lang="en-US" b="1" i="1" smtClean="0">
                             <a:latin typeface="Cambria Math" panose="02040503050406030204" pitchFamily="18" charset="0"/>
@@ -20572,10 +20546,7 @@
                   <a:pPr algn="l"/>
                   <a14:m>
                     <m:oMathPara xmlns:m="http://schemas.openxmlformats.org/officeDocument/2006/math">
-                      <m:oMathParaPr>
-                        <m:jc m:val="centerGroup"/>
-                      </m:oMathParaPr>
-                      <m:oMath xmlns:m="http://schemas.openxmlformats.org/officeDocument/2006/math">
+                      <m:oMath>
                         <m:r>
                           <a:rPr lang="en-US" b="0" i="1" smtClean="0">
                             <a:latin typeface="Cambria Math" panose="02040503050406030204" pitchFamily="18" charset="0"/>
@@ -20668,10 +20639,7 @@
                   <a:pPr algn="l"/>
                   <a14:m>
                     <m:oMathPara xmlns:m="http://schemas.openxmlformats.org/officeDocument/2006/math">
-                      <m:oMathParaPr>
-                        <m:jc m:val="centerGroup"/>
-                      </m:oMathParaPr>
-                      <m:oMath xmlns:m="http://schemas.openxmlformats.org/officeDocument/2006/math">
+                      <m:oMath>
                         <m:r>
                           <a:rPr lang="en-US" b="1" i="1" smtClean="0">
                             <a:latin typeface="Cambria Math" panose="02040503050406030204" pitchFamily="18" charset="0"/>
@@ -20838,10 +20806,7 @@
                   <a:pPr/>
                   <a14:m>
                     <m:oMathPara xmlns:m="http://schemas.openxmlformats.org/officeDocument/2006/math">
-                      <m:oMathParaPr>
-                        <m:jc m:val="centerGroup"/>
-                      </m:oMathParaPr>
-                      <m:oMath xmlns:m="http://schemas.openxmlformats.org/officeDocument/2006/math">
+                      <m:oMath>
                         <m:r>
                           <a:rPr lang="en-US" b="1" i="1">
                             <a:latin typeface="Cambria Math" panose="02040503050406030204" pitchFamily="18" charset="0"/>
@@ -21305,10 +21270,7 @@
                     <a:pPr/>
                     <a14:m>
                       <m:oMathPara xmlns:m="http://schemas.openxmlformats.org/officeDocument/2006/math">
-                        <m:oMathParaPr>
-                          <m:jc m:val="centerGroup"/>
-                        </m:oMathParaPr>
-                        <m:oMath xmlns:m="http://schemas.openxmlformats.org/officeDocument/2006/math">
+                        <m:oMath>
                           <m:r>
                             <a:rPr lang="en-US" b="0" i="1">
                               <a:latin typeface="Cambria Math" panose="02040503050406030204" pitchFamily="18" charset="0"/>
@@ -21428,10 +21390,7 @@
                     <a:pPr/>
                     <a14:m>
                       <m:oMathPara xmlns:m="http://schemas.openxmlformats.org/officeDocument/2006/math">
-                        <m:oMathParaPr>
-                          <m:jc m:val="centerGroup"/>
-                        </m:oMathParaPr>
-                        <m:oMath xmlns:m="http://schemas.openxmlformats.org/officeDocument/2006/math">
+                        <m:oMath>
                           <m:r>
                             <a:rPr lang="en-US" b="0" i="1" smtClean="0">
                               <a:latin typeface="Cambria Math" panose="02040503050406030204" pitchFamily="18" charset="0"/>
@@ -21551,10 +21510,7 @@
                     <a:pPr/>
                     <a14:m>
                       <m:oMathPara xmlns:m="http://schemas.openxmlformats.org/officeDocument/2006/math">
-                        <m:oMathParaPr>
-                          <m:jc m:val="centerGroup"/>
-                        </m:oMathParaPr>
-                        <m:oMath xmlns:m="http://schemas.openxmlformats.org/officeDocument/2006/math">
+                        <m:oMath>
                           <m:r>
                             <a:rPr lang="en-US" b="0" i="1" smtClean="0">
                               <a:latin typeface="Cambria Math" panose="02040503050406030204" pitchFamily="18" charset="0"/>
@@ -21674,10 +21630,7 @@
                     <a:pPr/>
                     <a14:m>
                       <m:oMathPara xmlns:m="http://schemas.openxmlformats.org/officeDocument/2006/math">
-                        <m:oMathParaPr>
-                          <m:jc m:val="centerGroup"/>
-                        </m:oMathParaPr>
-                        <m:oMath xmlns:m="http://schemas.openxmlformats.org/officeDocument/2006/math">
+                        <m:oMath>
                           <m:r>
                             <a:rPr lang="en-US" b="0" i="1" smtClean="0">
                               <a:latin typeface="Cambria Math" panose="02040503050406030204" pitchFamily="18" charset="0"/>
@@ -21839,10 +21792,7 @@
                     <a:pPr algn="ctr"/>
                     <a14:m>
                       <m:oMathPara xmlns:m="http://schemas.openxmlformats.org/officeDocument/2006/math">
-                        <m:oMathParaPr>
-                          <m:jc m:val="centerGroup"/>
-                        </m:oMathParaPr>
-                        <m:oMath xmlns:m="http://schemas.openxmlformats.org/officeDocument/2006/math">
+                        <m:oMath>
                           <m:r>
                             <a:rPr lang="en-US" sz="1600" b="0" i="1" smtClean="0">
                               <a:latin typeface="Cambria Math" panose="02040503050406030204" pitchFamily="18" charset="0"/>
@@ -21882,10 +21832,7 @@
                     <a:pPr algn="ctr"/>
                     <a14:m>
                       <m:oMathPara xmlns:m="http://schemas.openxmlformats.org/officeDocument/2006/math">
-                        <m:oMathParaPr>
-                          <m:jc m:val="centerGroup"/>
-                        </m:oMathParaPr>
-                        <m:oMath xmlns:m="http://schemas.openxmlformats.org/officeDocument/2006/math">
+                        <m:oMath>
                           <m:r>
                             <a:rPr lang="en-US" sz="1600" b="0" i="1" smtClean="0">
                               <a:latin typeface="Cambria Math" panose="02040503050406030204" pitchFamily="18" charset="0"/>
@@ -22360,7 +22307,7 @@
                     <m:sSub>
                       <m:sSubPr>
                         <m:ctrlPr>
-                          <a:rPr lang="en-US" b="0" i="1" smtClean="0">
+                          <a:rPr lang="en-US" b="0" i="0" smtClean="0">
                             <a:solidFill>
                               <a:schemeClr val="tx1"/>
                             </a:solidFill>
@@ -22722,10 +22669,7 @@
                   <a:pPr/>
                   <a14:m>
                     <m:oMathPara xmlns:m="http://schemas.openxmlformats.org/officeDocument/2006/math">
-                      <m:oMathParaPr>
-                        <m:jc m:val="centerGroup"/>
-                      </m:oMathParaPr>
-                      <m:oMath xmlns:m="http://schemas.openxmlformats.org/officeDocument/2006/math">
+                      <m:oMath>
                         <m:sSub>
                           <m:sSubPr>
                             <m:ctrlPr>
@@ -23585,14 +23529,11 @@
                 </a:pPr>
                 <a14:m>
                   <m:oMathPara xmlns:m="http://schemas.openxmlformats.org/officeDocument/2006/math">
-                    <m:oMathParaPr>
-                      <m:jc m:val="centerGroup"/>
-                    </m:oMathParaPr>
-                    <m:oMath xmlns:m="http://schemas.openxmlformats.org/officeDocument/2006/math">
+                    <m:oMath>
                       <m:sSub>
                         <m:sSubPr>
                           <m:ctrlPr>
-                            <a:rPr lang="en-SE" sz="1800" i="1" spc="-5" dirty="0" smtClean="0">
+                            <a:rPr lang="en-US" i="1" spc="-5" dirty="0">
                               <a:latin typeface="Cambria Math" panose="02040503050406030204" pitchFamily="18" charset="0"/>
                               <a:cs typeface="Arial"/>
                             </a:rPr>
@@ -23812,14 +23753,11 @@
                 </a:pPr>
                 <a14:m>
                   <m:oMathPara xmlns:m="http://schemas.openxmlformats.org/officeDocument/2006/math">
-                    <m:oMathParaPr>
-                      <m:jc m:val="centerGroup"/>
-                    </m:oMathParaPr>
-                    <m:oMath xmlns:m="http://schemas.openxmlformats.org/officeDocument/2006/math">
+                    <m:oMath>
                       <m:sSub>
                         <m:sSubPr>
                           <m:ctrlPr>
-                            <a:rPr lang="en-SE" i="1" spc="-5" dirty="0" smtClean="0">
+                            <a:rPr lang="en-US" i="1" spc="-5" dirty="0">
                               <a:latin typeface="Cambria Math" panose="02040503050406030204" pitchFamily="18" charset="0"/>
                               <a:cs typeface="Arial"/>
                             </a:rPr>
@@ -23933,10 +23871,7 @@
                 <a:pPr/>
                 <a14:m>
                   <m:oMathPara xmlns:m="http://schemas.openxmlformats.org/officeDocument/2006/math">
-                    <m:oMathParaPr>
-                      <m:jc m:val="centerGroup"/>
-                    </m:oMathParaPr>
-                    <m:oMath xmlns:m="http://schemas.openxmlformats.org/officeDocument/2006/math">
+                    <m:oMath>
                       <m:r>
                         <a:rPr lang="en-US" i="1" smtClean="0">
                           <a:latin typeface="Cambria Math" panose="02040503050406030204" pitchFamily="18" charset="0"/>
@@ -26691,7 +26626,7 @@
                     <m:sSub>
                       <m:sSubPr>
                         <m:ctrlPr>
-                          <a:rPr lang="en-US" b="0" i="1" dirty="0" smtClean="0">
+                          <a:rPr lang="en-US" i="1" dirty="0" smtClean="0">
                             <a:latin typeface="Cambria Math" panose="02040503050406030204" pitchFamily="18" charset="0"/>
                           </a:rPr>
                         </m:ctrlPr>
@@ -26722,7 +26657,7 @@
                     <m:sSub>
                       <m:sSubPr>
                         <m:ctrlPr>
-                          <a:rPr lang="en-US" b="0" i="1" dirty="0" smtClean="0">
+                          <a:rPr lang="en-US" i="1" dirty="0" smtClean="0">
                             <a:latin typeface="Cambria Math" panose="02040503050406030204" pitchFamily="18" charset="0"/>
                           </a:rPr>
                         </m:ctrlPr>
@@ -26765,7 +26700,7 @@
                     <m:sSub>
                       <m:sSubPr>
                         <m:ctrlPr>
-                          <a:rPr lang="en-US" b="0" i="1" dirty="0" smtClean="0">
+                          <a:rPr lang="en-US" i="1" dirty="0" smtClean="0">
                             <a:latin typeface="Cambria Math" panose="02040503050406030204" pitchFamily="18" charset="0"/>
                           </a:rPr>
                         </m:ctrlPr>
@@ -28450,7 +28385,7 @@
                             <m:begChr m:val="["/>
                             <m:endChr m:val="]"/>
                             <m:ctrlPr>
-                              <a:rPr lang="en-US" b="1" i="1" dirty="0" smtClean="0">
+                              <a:rPr lang="en-US" i="1" dirty="0" smtClean="0">
                                 <a:latin typeface="Cambria Math" panose="02040503050406030204" pitchFamily="18" charset="0"/>
                               </a:rPr>
                             </m:ctrlPr>
@@ -28459,7 +28394,7 @@
                             <m:sSub>
                               <m:sSubPr>
                                 <m:ctrlPr>
-                                  <a:rPr lang="en-US" i="1" dirty="0" smtClean="0">
+                                  <a:rPr lang="en-US" b="0" i="1" dirty="0" smtClean="0">
                                     <a:latin typeface="Cambria Math" panose="02040503050406030204" pitchFamily="18" charset="0"/>
                                   </a:rPr>
                                 </m:ctrlPr>
@@ -28490,7 +28425,7 @@
                             <m:sSub>
                               <m:sSubPr>
                                 <m:ctrlPr>
-                                  <a:rPr lang="en-US" i="1" dirty="0" smtClean="0">
+                                  <a:rPr lang="en-US" b="0" i="1" dirty="0" smtClean="0">
                                     <a:latin typeface="Cambria Math" panose="02040503050406030204" pitchFamily="18" charset="0"/>
                                   </a:rPr>
                                 </m:ctrlPr>
@@ -28521,7 +28456,7 @@
                             <m:sSub>
                               <m:sSubPr>
                                 <m:ctrlPr>
-                                  <a:rPr lang="en-US" i="1" dirty="0" smtClean="0">
+                                  <a:rPr lang="en-US" b="0" i="1" dirty="0" smtClean="0">
                                     <a:latin typeface="Cambria Math" panose="02040503050406030204" pitchFamily="18" charset="0"/>
                                   </a:rPr>
                                 </m:ctrlPr>
@@ -28569,7 +28504,7 @@
                     <m:sSub>
                       <m:sSubPr>
                         <m:ctrlPr>
-                          <a:rPr lang="en-US" b="0" i="1" spc="-5" dirty="0" smtClean="0">
+                          <a:rPr lang="en-US" i="1" spc="-5" dirty="0" smtClean="0">
                             <a:latin typeface="Cambria Math" panose="02040503050406030204" pitchFamily="18" charset="0"/>
                             <a:cs typeface="Arial"/>
                           </a:rPr>
@@ -28615,7 +28550,7 @@
                     <m:sSub>
                       <m:sSubPr>
                         <m:ctrlPr>
-                          <a:rPr lang="en-US" b="0" i="1" spc="-5" dirty="0" smtClean="0">
+                          <a:rPr lang="en-US" i="1" spc="-5" dirty="0" smtClean="0">
                             <a:latin typeface="Cambria Math" panose="02040503050406030204" pitchFamily="18" charset="0"/>
                             <a:cs typeface="Arial"/>
                           </a:rPr>
@@ -28654,7 +28589,7 @@
                     <m:sSub>
                       <m:sSubPr>
                         <m:ctrlPr>
-                          <a:rPr lang="en-US" b="0" i="1" spc="-5" dirty="0" smtClean="0">
+                          <a:rPr lang="en-US" i="1" spc="-5" dirty="0" smtClean="0">
                             <a:latin typeface="Cambria Math" panose="02040503050406030204" pitchFamily="18" charset="0"/>
                             <a:cs typeface="Arial"/>
                           </a:rPr>
@@ -28780,6 +28715,7 @@
                         <m:ctrlPr>
                           <a:rPr lang="en-US" sz="3200" b="0" i="1" spc="-5" dirty="0" smtClean="0">
                             <a:latin typeface="Cambria Math" panose="02040503050406030204" pitchFamily="18" charset="0"/>
+                            <a:cs typeface="Arial"/>
                           </a:rPr>
                         </m:ctrlPr>
                       </m:sSubPr>
@@ -28840,8 +28776,9 @@
                     <m:sSub>
                       <m:sSubPr>
                         <m:ctrlPr>
-                          <a:rPr lang="en-US" i="1" spc="-5" dirty="0">
-                            <a:latin typeface="Cambria Math" panose="02040503050406030204" pitchFamily="18" charset="0"/>
+                          <a:rPr lang="en-US" b="0" i="1" spc="-5" dirty="0" smtClean="0">
+                            <a:latin typeface="Cambria Math" panose="02040503050406030204" pitchFamily="18" charset="0"/>
+                            <a:cs typeface="Arial"/>
                           </a:rPr>
                         </m:ctrlPr>
                       </m:sSubPr>
@@ -28902,8 +28839,9 @@
                     <m:sSub>
                       <m:sSubPr>
                         <m:ctrlPr>
-                          <a:rPr lang="en-US" i="1" spc="-5" dirty="0">
-                            <a:latin typeface="Cambria Math" panose="02040503050406030204" pitchFamily="18" charset="0"/>
+                          <a:rPr lang="en-US" b="0" i="1" spc="-5" dirty="0" smtClean="0">
+                            <a:latin typeface="Cambria Math" panose="02040503050406030204" pitchFamily="18" charset="0"/>
+                            <a:cs typeface="Arial"/>
                           </a:rPr>
                         </m:ctrlPr>
                       </m:sSubPr>
@@ -29245,7 +29183,7 @@
                     <m:d>
                       <m:dPr>
                         <m:ctrlPr>
-                          <a:rPr lang="en-US" b="1" i="1" dirty="0">
+                          <a:rPr lang="en-US" b="0" i="1" dirty="0" smtClean="0">
                             <a:latin typeface="Cambria Math" panose="02040503050406030204" pitchFamily="18" charset="0"/>
                           </a:rPr>
                         </m:ctrlPr>
@@ -29437,7 +29375,7 @@
                     <m:d>
                       <m:dPr>
                         <m:ctrlPr>
-                          <a:rPr lang="en-US" b="1" i="1" dirty="0">
+                          <a:rPr lang="en-US" b="0" i="1" dirty="0" smtClean="0">
                             <a:latin typeface="Cambria Math" panose="02040503050406030204" pitchFamily="18" charset="0"/>
                           </a:rPr>
                         </m:ctrlPr>
@@ -31015,10 +30953,7 @@
                           <a:pPr/>
                           <a14:m>
                             <m:oMathPara xmlns:m="http://schemas.openxmlformats.org/officeDocument/2006/math">
-                              <m:oMathParaPr>
-                                <m:jc m:val="centerGroup"/>
-                              </m:oMathParaPr>
-                              <m:oMath xmlns:m="http://schemas.openxmlformats.org/officeDocument/2006/math">
+                              <m:oMath>
                                 <m:sSub>
                                   <m:sSubPr>
                                     <m:ctrlPr>
@@ -31073,10 +31008,7 @@
                           <a:pPr/>
                           <a14:m>
                             <m:oMathPara xmlns:m="http://schemas.openxmlformats.org/officeDocument/2006/math">
-                              <m:oMathParaPr>
-                                <m:jc m:val="centerGroup"/>
-                              </m:oMathParaPr>
-                              <m:oMath xmlns:m="http://schemas.openxmlformats.org/officeDocument/2006/math">
+                              <m:oMath>
                                 <m:sSub>
                                   <m:sSubPr>
                                     <m:ctrlPr>
@@ -31131,10 +31063,7 @@
                           <a:pPr/>
                           <a14:m>
                             <m:oMathPara xmlns:m="http://schemas.openxmlformats.org/officeDocument/2006/math">
-                              <m:oMathParaPr>
-                                <m:jc m:val="centerGroup"/>
-                              </m:oMathParaPr>
-                              <m:oMath xmlns:m="http://schemas.openxmlformats.org/officeDocument/2006/math">
+                              <m:oMath>
                                 <m:r>
                                   <a:rPr lang="en-US" sz="1900" b="1" i="1" smtClean="0">
                                     <a:solidFill>
@@ -31171,10 +31100,7 @@
                           <a:pPr/>
                           <a14:m>
                             <m:oMathPara xmlns:m="http://schemas.openxmlformats.org/officeDocument/2006/math">
-                              <m:oMathParaPr>
-                                <m:jc m:val="centerGroup"/>
-                              </m:oMathParaPr>
-                              <m:oMath xmlns:m="http://schemas.openxmlformats.org/officeDocument/2006/math">
+                              <m:oMath>
                                 <m:r>
                                   <a:rPr lang="en-US" sz="1900" b="0" i="1" smtClean="0">
                                     <a:latin typeface="Cambria Math" panose="02040503050406030204" pitchFamily="18" charset="0"/>
@@ -31197,10 +31123,7 @@
                           <a:pPr/>
                           <a14:m>
                             <m:oMathPara xmlns:m="http://schemas.openxmlformats.org/officeDocument/2006/math">
-                              <m:oMathParaPr>
-                                <m:jc m:val="centerGroup"/>
-                              </m:oMathParaPr>
-                              <m:oMath xmlns:m="http://schemas.openxmlformats.org/officeDocument/2006/math">
+                              <m:oMath>
                                 <m:r>
                                   <a:rPr lang="en-US" sz="1900" b="0" i="1" smtClean="0">
                                     <a:latin typeface="Cambria Math" panose="02040503050406030204" pitchFamily="18" charset="0"/>
@@ -31223,10 +31146,7 @@
                           <a:pPr/>
                           <a14:m>
                             <m:oMathPara xmlns:m="http://schemas.openxmlformats.org/officeDocument/2006/math">
-                              <m:oMathParaPr>
-                                <m:jc m:val="centerGroup"/>
-                              </m:oMathParaPr>
-                              <m:oMath xmlns:m="http://schemas.openxmlformats.org/officeDocument/2006/math">
+                              <m:oMath>
                                 <m:r>
                                   <a:rPr lang="en-US" sz="1900" b="0" i="1" smtClean="0">
                                     <a:latin typeface="Cambria Math" panose="02040503050406030204" pitchFamily="18" charset="0"/>
@@ -31256,10 +31176,7 @@
                           <a:pPr/>
                           <a14:m>
                             <m:oMathPara xmlns:m="http://schemas.openxmlformats.org/officeDocument/2006/math">
-                              <m:oMathParaPr>
-                                <m:jc m:val="centerGroup"/>
-                              </m:oMathParaPr>
-                              <m:oMath xmlns:m="http://schemas.openxmlformats.org/officeDocument/2006/math">
+                              <m:oMath>
                                 <m:r>
                                   <a:rPr lang="en-US" sz="1900" b="0" i="1" smtClean="0">
                                     <a:latin typeface="Cambria Math" panose="02040503050406030204" pitchFamily="18" charset="0"/>
@@ -31282,10 +31199,7 @@
                           <a:pPr/>
                           <a14:m>
                             <m:oMathPara xmlns:m="http://schemas.openxmlformats.org/officeDocument/2006/math">
-                              <m:oMathParaPr>
-                                <m:jc m:val="centerGroup"/>
-                              </m:oMathParaPr>
-                              <m:oMath xmlns:m="http://schemas.openxmlformats.org/officeDocument/2006/math">
+                              <m:oMath>
                                 <m:r>
                                   <a:rPr lang="en-US" sz="1900" b="0" i="1" smtClean="0">
                                     <a:latin typeface="Cambria Math" panose="02040503050406030204" pitchFamily="18" charset="0"/>
@@ -31308,10 +31222,7 @@
                           <a:pPr/>
                           <a14:m>
                             <m:oMathPara xmlns:m="http://schemas.openxmlformats.org/officeDocument/2006/math">
-                              <m:oMathParaPr>
-                                <m:jc m:val="centerGroup"/>
-                              </m:oMathParaPr>
-                              <m:oMath xmlns:m="http://schemas.openxmlformats.org/officeDocument/2006/math">
+                              <m:oMath>
                                 <m:r>
                                   <a:rPr lang="en-US" sz="1900" b="0" i="1" smtClean="0">
                                     <a:latin typeface="Cambria Math" panose="02040503050406030204" pitchFamily="18" charset="0"/>
@@ -31341,10 +31252,7 @@
                           <a:pPr/>
                           <a14:m>
                             <m:oMathPara xmlns:m="http://schemas.openxmlformats.org/officeDocument/2006/math">
-                              <m:oMathParaPr>
-                                <m:jc m:val="centerGroup"/>
-                              </m:oMathParaPr>
-                              <m:oMath xmlns:m="http://schemas.openxmlformats.org/officeDocument/2006/math">
+                              <m:oMath>
                                 <m:r>
                                   <a:rPr lang="en-US" sz="1900" b="0" i="1" smtClean="0">
                                     <a:latin typeface="Cambria Math" panose="02040503050406030204" pitchFamily="18" charset="0"/>
@@ -31367,10 +31275,7 @@
                           <a:pPr/>
                           <a14:m>
                             <m:oMathPara xmlns:m="http://schemas.openxmlformats.org/officeDocument/2006/math">
-                              <m:oMathParaPr>
-                                <m:jc m:val="centerGroup"/>
-                              </m:oMathParaPr>
-                              <m:oMath xmlns:m="http://schemas.openxmlformats.org/officeDocument/2006/math">
+                              <m:oMath>
                                 <m:r>
                                   <a:rPr lang="en-US" sz="1900" b="0" i="1" smtClean="0">
                                     <a:latin typeface="Cambria Math" panose="02040503050406030204" pitchFamily="18" charset="0"/>
@@ -31393,10 +31298,7 @@
                           <a:pPr/>
                           <a14:m>
                             <m:oMathPara xmlns:m="http://schemas.openxmlformats.org/officeDocument/2006/math">
-                              <m:oMathParaPr>
-                                <m:jc m:val="centerGroup"/>
-                              </m:oMathParaPr>
-                              <m:oMath xmlns:m="http://schemas.openxmlformats.org/officeDocument/2006/math">
+                              <m:oMath>
                                 <m:r>
                                   <a:rPr lang="en-US" sz="1900" b="0" i="1" smtClean="0">
                                     <a:latin typeface="Cambria Math" panose="02040503050406030204" pitchFamily="18" charset="0"/>
@@ -31426,10 +31328,7 @@
                           <a:pPr/>
                           <a14:m>
                             <m:oMathPara xmlns:m="http://schemas.openxmlformats.org/officeDocument/2006/math">
-                              <m:oMathParaPr>
-                                <m:jc m:val="centerGroup"/>
-                              </m:oMathParaPr>
-                              <m:oMath xmlns:m="http://schemas.openxmlformats.org/officeDocument/2006/math">
+                              <m:oMath>
                                 <m:r>
                                   <a:rPr lang="en-US" sz="1900" b="0" i="1" smtClean="0">
                                     <a:latin typeface="Cambria Math" panose="02040503050406030204" pitchFamily="18" charset="0"/>
@@ -31452,10 +31351,7 @@
                           <a:pPr/>
                           <a14:m>
                             <m:oMathPara xmlns:m="http://schemas.openxmlformats.org/officeDocument/2006/math">
-                              <m:oMathParaPr>
-                                <m:jc m:val="centerGroup"/>
-                              </m:oMathParaPr>
-                              <m:oMath xmlns:m="http://schemas.openxmlformats.org/officeDocument/2006/math">
+                              <m:oMath>
                                 <m:r>
                                   <a:rPr lang="en-US" sz="1900" b="0" i="1" smtClean="0">
                                     <a:latin typeface="Cambria Math" panose="02040503050406030204" pitchFamily="18" charset="0"/>
@@ -31478,10 +31374,7 @@
                           <a:pPr/>
                           <a14:m>
                             <m:oMathPara xmlns:m="http://schemas.openxmlformats.org/officeDocument/2006/math">
-                              <m:oMathParaPr>
-                                <m:jc m:val="centerGroup"/>
-                              </m:oMathParaPr>
-                              <m:oMath xmlns:m="http://schemas.openxmlformats.org/officeDocument/2006/math">
+                              <m:oMath>
                                 <m:r>
                                   <a:rPr lang="en-US" sz="1900" b="0" i="1" smtClean="0">
                                     <a:latin typeface="Cambria Math" panose="02040503050406030204" pitchFamily="18" charset="0"/>
@@ -32938,21 +32831,21 @@
 </file>
 
 <file path=customXml/item2.xml><?xml version="1.0" encoding="utf-8"?>
+<p:properties xmlns:p="http://schemas.microsoft.com/office/2006/metadata/properties" xmlns:xsi="http://www.w3.org/2001/XMLSchema-instance" xmlns:pc="http://schemas.microsoft.com/office/infopath/2007/PartnerControls">
+  <documentManagement>
+    <_ip_UnifiedCompliancePolicyUIAction xmlns="http://schemas.microsoft.com/sharepoint/v3" xsi:nil="true"/>
+    <_ip_UnifiedCompliancePolicyProperties xmlns="http://schemas.microsoft.com/sharepoint/v3" xsi:nil="true"/>
+  </documentManagement>
+</p:properties>
+</file>
+
+<file path=customXml/item3.xml><?xml version="1.0" encoding="utf-8"?>
 <?mso-contentType ?>
 <FormTemplates xmlns="http://schemas.microsoft.com/sharepoint/v3/contenttype/forms">
   <Display>DocumentLibraryForm</Display>
   <Edit>DocumentLibraryForm</Edit>
   <New>DocumentLibraryForm</New>
 </FormTemplates>
-</file>
-
-<file path=customXml/item3.xml><?xml version="1.0" encoding="utf-8"?>
-<p:properties xmlns:p="http://schemas.microsoft.com/office/2006/metadata/properties" xmlns:xsi="http://www.w3.org/2001/XMLSchema-instance" xmlns:pc="http://schemas.microsoft.com/office/infopath/2007/PartnerControls">
-  <documentManagement>
-    <_ip_UnifiedCompliancePolicyUIAction xmlns="http://schemas.microsoft.com/sharepoint/v3" xsi:nil="true"/>
-    <_ip_UnifiedCompliancePolicyProperties xmlns="http://schemas.microsoft.com/sharepoint/v3" xsi:nil="true"/>
-  </documentManagement>
-</p:properties>
 </file>
 
 <file path=customXml/itemProps1.xml><?xml version="1.0" encoding="utf-8"?>
@@ -32976,14 +32869,6 @@
 </file>
 
 <file path=customXml/itemProps2.xml><?xml version="1.0" encoding="utf-8"?>
-<ds:datastoreItem xmlns:ds="http://schemas.openxmlformats.org/officeDocument/2006/customXml" ds:itemID="{AC991D47-3926-48A1-8BC1-320FB99AB8DB}">
-  <ds:schemaRefs>
-    <ds:schemaRef ds:uri="http://schemas.microsoft.com/sharepoint/v3/contenttype/forms"/>
-  </ds:schemaRefs>
-</ds:datastoreItem>
-</file>
-
-<file path=customXml/itemProps3.xml><?xml version="1.0" encoding="utf-8"?>
 <ds:datastoreItem xmlns:ds="http://schemas.openxmlformats.org/officeDocument/2006/customXml" ds:itemID="{4642294E-F67E-4944-9A87-D5C631307A05}">
   <ds:schemaRefs>
     <ds:schemaRef ds:uri="13bd0950-6268-4383-96fe-5fe3a48110ec"/>
@@ -32999,4 +32884,12 @@
     <ds:schemaRef ds:uri="http://www.w3.org/XML/1998/namespace"/>
   </ds:schemaRefs>
 </ds:datastoreItem>
+</file>
+
+<file path=customXml/itemProps3.xml><?xml version="1.0" encoding="utf-8"?>
+<ds:datastoreItem xmlns:ds="http://schemas.openxmlformats.org/officeDocument/2006/customXml" ds:itemID="{AC991D47-3926-48A1-8BC1-320FB99AB8DB}">
+  <ds:schemaRefs>
+    <ds:schemaRef ds:uri="http://schemas.microsoft.com/sharepoint/v3/contenttype/forms"/>
+  </ds:schemaRefs>
+</ds:datastoreItem>
 </file>
--- a/PPTs/L2 Intro to ML.pptx
+++ b/PPTs/L2 Intro to ML.pptx
@@ -194,6 +194,32 @@
 </p:presentation>
 </file>
 
+<file path=ppt/ink/ink1.xml><?xml version="1.0" encoding="utf-8"?>
+<inkml:ink xmlns:inkml="http://www.w3.org/2003/InkML">
+  <inkml:definitions>
+    <inkml:context xml:id="ctx0">
+      <inkml:inkSource xml:id="inkSrc0">
+        <inkml:traceFormat>
+          <inkml:channel name="X" type="integer" min="-2.14748E9" max="2.14748E9" units="cm"/>
+          <inkml:channel name="Y" type="integer" min="-2.14748E9" max="2.14748E9" units="cm"/>
+        </inkml:traceFormat>
+        <inkml:channelProperties>
+          <inkml:channelProperty channel="X" name="resolution" value="1000" units="1/cm"/>
+          <inkml:channelProperty channel="Y" name="resolution" value="1000" units="1/cm"/>
+        </inkml:channelProperties>
+      </inkml:inkSource>
+      <inkml:timestamp xml:id="ts0" timeString="2026-09-21T15:34:01.344"/>
+    </inkml:context>
+    <inkml:brush xml:id="br0">
+      <inkml:brushProperty name="width" value="0.05" units="cm"/>
+      <inkml:brushProperty name="height" value="0.05" units="cm"/>
+      <inkml:brushProperty name="ignorePressure" value="1"/>
+    </inkml:brush>
+  </inkml:definitions>
+  <inkml:trace contextRef="#ctx0" brushRef="#br0">0 0,'0'0</inkml:trace>
+</inkml:ink>
+</file>
+
 <file path=ppt/notesMasters/notesMaster1.xml><?xml version="1.0" encoding="utf-8"?>
 <p:notesMaster xmlns:a="http://schemas.openxmlformats.org/drawingml/2006/main" xmlns:r="http://schemas.openxmlformats.org/officeDocument/2006/relationships" xmlns:p="http://schemas.openxmlformats.org/presentationml/2006/main">
   <p:cSld>
@@ -276,7 +302,7 @@
           <a:p>
             <a:fld id="{A2B3DE59-F14A-BE48-A4BD-826E6AEB8CEC}" type="datetimeFigureOut">
               <a:rPr lang="en-US" smtClean="0"/>
-              <a:t>9/10/2026</a:t>
+              <a:t>9/21/2026</a:t>
             </a:fld>
             <a:endParaRPr lang="en-US"/>
           </a:p>
@@ -801,7 +827,7 @@
           <a:p>
             <a:fld id="{7077AFBB-1CF4-8544-90DC-1ED8B9AA61D3}" type="datetime1">
               <a:rPr lang="en-US" smtClean="0"/>
-              <a:t>9/10/2026</a:t>
+              <a:t>9/21/2026</a:t>
             </a:fld>
             <a:endParaRPr lang="en-US"/>
           </a:p>
@@ -999,7 +1025,7 @@
           <a:p>
             <a:fld id="{1C00165F-9719-7745-8559-6A7EE2923027}" type="datetime1">
               <a:rPr lang="en-US" smtClean="0"/>
-              <a:t>9/10/2026</a:t>
+              <a:t>9/21/2026</a:t>
             </a:fld>
             <a:endParaRPr lang="en-US"/>
           </a:p>
@@ -1207,7 +1233,7 @@
           <a:p>
             <a:fld id="{4C6A8D55-FA0C-7D43-BAC0-BED15F1C12ED}" type="datetime1">
               <a:rPr lang="en-US" smtClean="0"/>
-              <a:t>9/10/2026</a:t>
+              <a:t>9/21/2026</a:t>
             </a:fld>
             <a:endParaRPr lang="en-US"/>
           </a:p>
@@ -1427,7 +1453,7 @@
           <a:p>
             <a:fld id="{7FA70553-0253-CE4B-B6C1-A630CB55C29D}" type="datetime1">
               <a:rPr lang="en-US" smtClean="0"/>
-              <a:t>9/10/2026</a:t>
+              <a:t>9/21/2026</a:t>
             </a:fld>
             <a:endParaRPr lang="en-US"/>
           </a:p>
@@ -1625,7 +1651,7 @@
           <a:p>
             <a:fld id="{105DE84E-69F4-FD40-ABD1-0EFAC22A12F3}" type="datetime1">
               <a:rPr lang="en-US" smtClean="0"/>
-              <a:t>9/10/2026</a:t>
+              <a:t>9/21/2026</a:t>
             </a:fld>
             <a:endParaRPr lang="en-US"/>
           </a:p>
@@ -1900,7 +1926,7 @@
           <a:p>
             <a:fld id="{10C0B3DB-0D9D-DD44-80C5-08109265E077}" type="datetime1">
               <a:rPr lang="en-US" smtClean="0"/>
-              <a:t>9/10/2026</a:t>
+              <a:t>9/21/2026</a:t>
             </a:fld>
             <a:endParaRPr lang="en-US"/>
           </a:p>
@@ -2165,7 +2191,7 @@
           <a:p>
             <a:fld id="{797EA869-A27D-C344-97D7-71199BBF260C}" type="datetime1">
               <a:rPr lang="en-US" smtClean="0"/>
-              <a:t>9/10/2026</a:t>
+              <a:t>9/21/2026</a:t>
             </a:fld>
             <a:endParaRPr lang="en-US"/>
           </a:p>
@@ -2577,7 +2603,7 @@
           <a:p>
             <a:fld id="{E7A15D25-E67F-1942-BBE6-90A232C6709A}" type="datetime1">
               <a:rPr lang="en-US" smtClean="0"/>
-              <a:t>9/10/2026</a:t>
+              <a:t>9/21/2026</a:t>
             </a:fld>
             <a:endParaRPr lang="en-US"/>
           </a:p>
@@ -2718,7 +2744,7 @@
           <a:p>
             <a:fld id="{CB2E0881-5289-1B49-8243-C7A7C2D761C1}" type="datetime1">
               <a:rPr lang="en-US" smtClean="0"/>
-              <a:t>9/10/2026</a:t>
+              <a:t>9/21/2026</a:t>
             </a:fld>
             <a:endParaRPr lang="en-US"/>
           </a:p>
@@ -2831,7 +2857,7 @@
           <a:p>
             <a:fld id="{BE289B97-0FAD-A54C-B1E0-81D6BDD23977}" type="datetime1">
               <a:rPr lang="en-US" smtClean="0"/>
-              <a:t>9/10/2026</a:t>
+              <a:t>9/21/2026</a:t>
             </a:fld>
             <a:endParaRPr lang="en-US"/>
           </a:p>
@@ -3142,7 +3168,7 @@
           <a:p>
             <a:fld id="{3CDAE13F-8788-6040-8DCF-36B10FE0117C}" type="datetime1">
               <a:rPr lang="en-US" smtClean="0"/>
-              <a:t>9/10/2026</a:t>
+              <a:t>9/21/2026</a:t>
             </a:fld>
             <a:endParaRPr lang="en-US"/>
           </a:p>
@@ -3355,7 +3381,7 @@
           <a:p>
             <a:fld id="{4553E244-3CAB-5240-928D-C4F781982911}" type="datetime1">
               <a:rPr lang="en-US" smtClean="0"/>
-              <a:t>9/10/2026</a:t>
+              <a:t>9/21/2026</a:t>
             </a:fld>
             <a:endParaRPr lang="en-US" dirty="0"/>
           </a:p>
@@ -3669,7 +3695,7 @@
           <a:p>
             <a:fld id="{8DA2BFAE-9CFE-3F4B-9BA6-76D3AD40298B}" type="datetime1">
               <a:rPr lang="en-US" smtClean="0"/>
-              <a:t>9/10/2026</a:t>
+              <a:t>9/21/2026</a:t>
             </a:fld>
             <a:endParaRPr lang="en-US"/>
           </a:p>
@@ -3867,7 +3893,7 @@
           <a:p>
             <a:fld id="{862BC747-2201-4149-89A6-B535544AC76E}" type="datetime1">
               <a:rPr lang="en-US" smtClean="0"/>
-              <a:t>9/10/2026</a:t>
+              <a:t>9/21/2026</a:t>
             </a:fld>
             <a:endParaRPr lang="en-US"/>
           </a:p>
@@ -4075,7 +4101,7 @@
           <a:p>
             <a:fld id="{2B6899FF-A9B6-EA4C-92F4-3B955917C48A}" type="datetime1">
               <a:rPr lang="en-US" smtClean="0"/>
-              <a:t>9/10/2026</a:t>
+              <a:t>9/21/2026</a:t>
             </a:fld>
             <a:endParaRPr lang="en-US"/>
           </a:p>
@@ -4350,7 +4376,7 @@
           <a:p>
             <a:fld id="{E433CC24-15E2-8440-82CF-DFE60D570E43}" type="datetime1">
               <a:rPr lang="en-US" smtClean="0"/>
-              <a:t>9/10/2026</a:t>
+              <a:t>9/21/2026</a:t>
             </a:fld>
             <a:endParaRPr lang="en-US"/>
           </a:p>
@@ -4615,7 +4641,7 @@
           <a:p>
             <a:fld id="{8DFE6C63-9089-6A49-BC6E-454A735346DF}" type="datetime1">
               <a:rPr lang="en-US" smtClean="0"/>
-              <a:t>9/10/2026</a:t>
+              <a:t>9/21/2026</a:t>
             </a:fld>
             <a:endParaRPr lang="en-US"/>
           </a:p>
@@ -5027,7 +5053,7 @@
           <a:p>
             <a:fld id="{3577C773-47BC-AB4F-9BFA-AB3DE15F2F0E}" type="datetime1">
               <a:rPr lang="en-US" smtClean="0"/>
-              <a:t>9/10/2026</a:t>
+              <a:t>9/21/2026</a:t>
             </a:fld>
             <a:endParaRPr lang="en-US"/>
           </a:p>
@@ -5168,7 +5194,7 @@
           <a:p>
             <a:fld id="{C5911242-D6ED-7442-B4D5-571BA5F763EC}" type="datetime1">
               <a:rPr lang="en-US" smtClean="0"/>
-              <a:t>9/10/2026</a:t>
+              <a:t>9/21/2026</a:t>
             </a:fld>
             <a:endParaRPr lang="en-US"/>
           </a:p>
@@ -5281,7 +5307,7 @@
           <a:p>
             <a:fld id="{53D49004-9440-C34D-AFCF-72D617EF0844}" type="datetime1">
               <a:rPr lang="en-US" smtClean="0"/>
-              <a:t>9/10/2026</a:t>
+              <a:t>9/21/2026</a:t>
             </a:fld>
             <a:endParaRPr lang="en-US"/>
           </a:p>
@@ -5592,7 +5618,7 @@
           <a:p>
             <a:fld id="{6CEC9C39-AF37-7048-A5F3-2138FC4EBAA9}" type="datetime1">
               <a:rPr lang="en-US" smtClean="0"/>
-              <a:t>9/10/2026</a:t>
+              <a:t>9/21/2026</a:t>
             </a:fld>
             <a:endParaRPr lang="en-US"/>
           </a:p>
@@ -5880,7 +5906,7 @@
           <a:p>
             <a:fld id="{8F9F80C6-6E15-BC44-A547-629E68A1897C}" type="datetime1">
               <a:rPr lang="en-US" smtClean="0"/>
-              <a:t>9/10/2026</a:t>
+              <a:t>9/21/2026</a:t>
             </a:fld>
             <a:endParaRPr lang="en-US"/>
           </a:p>
@@ -6121,7 +6147,7 @@
           <a:p>
             <a:fld id="{B1484145-EBBF-4546-953A-FE89B9B40A32}" type="datetime1">
               <a:rPr lang="en-US" smtClean="0"/>
-              <a:t>9/10/2026</a:t>
+              <a:t>9/21/2026</a:t>
             </a:fld>
             <a:endParaRPr lang="en-US"/>
           </a:p>
@@ -6809,7 +6835,7 @@
           <a:p>
             <a:fld id="{35187CD5-43F5-7F4F-8DF9-F56AF4D056AA}" type="datetime1">
               <a:rPr lang="en-US" smtClean="0"/>
-              <a:t>9/10/2026</a:t>
+              <a:t>9/21/2026</a:t>
             </a:fld>
             <a:endParaRPr lang="en-US"/>
           </a:p>
@@ -7806,7 +7832,7 @@
           <a:p>
             <a:r>
               <a:rPr lang="en-US" dirty="0"/>
-              <a:t>But too many layers and neurons may lead to overfitting</a:t>
+              <a:t>But too many layers and neurons may lead to overfitting (good performance on training set, poor performance on test set)</a:t>
             </a:r>
           </a:p>
         </p:txBody>
@@ -8121,7 +8147,7 @@
                           <a:rPr lang="en-US" i="1">
                             <a:latin typeface="Cambria Math" panose="02040503050406030204" pitchFamily="18" charset="0"/>
                           </a:rPr>
-                          <m:t>ℎ</m:t>
+                          <m:t>h</m:t>
                         </m:r>
                       </m:e>
                       <m:sub>
@@ -8211,7 +8237,7 @@
                           <a:rPr lang="en-US" i="1">
                             <a:latin typeface="Cambria Math" panose="02040503050406030204" pitchFamily="18" charset="0"/>
                           </a:rPr>
-                          <m:t>ℎ</m:t>
+                          <m:t>h</m:t>
                         </m:r>
                       </m:e>
                       <m:sub>
@@ -8356,7 +8382,7 @@
                           <a:rPr lang="en-US" i="1">
                             <a:latin typeface="Cambria Math" panose="02040503050406030204" pitchFamily="18" charset="0"/>
                           </a:rPr>
-                          <m:t>ℎ</m:t>
+                          <m:t>h</m:t>
                         </m:r>
                       </m:e>
                       <m:sub>
@@ -8406,7 +8432,7 @@
                           <a:rPr lang="en-US" i="1">
                             <a:latin typeface="Cambria Math" panose="02040503050406030204" pitchFamily="18" charset="0"/>
                           </a:rPr>
-                          <m:t>ℎ</m:t>
+                          <m:t>h</m:t>
                         </m:r>
                       </m:e>
                       <m:sub>
@@ -8469,7 +8495,7 @@
                     <m:func>
                       <m:funcPr>
                         <m:ctrlPr>
-                          <a:rPr lang="en-US" b="0" i="0" smtClean="0">
+                          <a:rPr lang="en-US" b="0" i="1" smtClean="0">
                             <a:latin typeface="Cambria Math" panose="02040503050406030204" pitchFamily="18" charset="0"/>
                           </a:rPr>
                         </m:ctrlPr>
@@ -8490,7 +8516,19 @@
                           <a:rPr lang="en-US" b="0" i="1" smtClean="0">
                             <a:latin typeface="Cambria Math" panose="02040503050406030204" pitchFamily="18" charset="0"/>
                           </a:rPr>
-                          <m:t>(0,</m:t>
+                          <m:t>(</m:t>
+                        </m:r>
+                        <m:r>
+                          <a:rPr lang="en-US" b="0" i="1" smtClean="0">
+                            <a:latin typeface="Cambria Math" panose="02040503050406030204" pitchFamily="18" charset="0"/>
+                          </a:rPr>
+                          <m:t>0</m:t>
+                        </m:r>
+                        <m:r>
+                          <a:rPr lang="en-US" b="0" i="1" smtClean="0">
+                            <a:latin typeface="Cambria Math" panose="02040503050406030204" pitchFamily="18" charset="0"/>
+                          </a:rPr>
+                          <m:t>,</m:t>
                         </m:r>
                         <m:sSub>
                           <m:sSubPr>
@@ -8520,7 +8558,7 @@
                         <m:func>
                           <m:funcPr>
                             <m:ctrlPr>
-                              <a:rPr lang="en-US" b="0" i="0" smtClean="0">
+                              <a:rPr lang="en-US" b="0" i="1" smtClean="0">
                                 <a:latin typeface="Cambria Math" panose="02040503050406030204" pitchFamily="18" charset="0"/>
                               </a:rPr>
                             </m:ctrlPr>
@@ -8541,7 +8579,19 @@
                               <a:rPr lang="en-US" b="0" i="1" smtClean="0">
                                 <a:latin typeface="Cambria Math" panose="02040503050406030204" pitchFamily="18" charset="0"/>
                               </a:rPr>
-                              <m:t>(0,</m:t>
+                              <m:t>(</m:t>
+                            </m:r>
+                            <m:r>
+                              <a:rPr lang="en-US" b="0" i="1" smtClean="0">
+                                <a:latin typeface="Cambria Math" panose="02040503050406030204" pitchFamily="18" charset="0"/>
+                              </a:rPr>
+                              <m:t>0</m:t>
+                            </m:r>
+                            <m:r>
+                              <a:rPr lang="en-US" b="0" i="1" smtClean="0">
+                                <a:latin typeface="Cambria Math" panose="02040503050406030204" pitchFamily="18" charset="0"/>
+                              </a:rPr>
+                              <m:t>,</m:t>
                             </m:r>
                             <m:sSub>
                               <m:sSubPr>
@@ -9133,7 +9183,7 @@
                         <m:func>
                           <m:funcPr>
                             <m:ctrlPr>
-                              <a:rPr lang="en-US" b="0" i="0" smtClean="0">
+                              <a:rPr lang="en-US" b="0" i="1" smtClean="0">
                                 <a:latin typeface="Cambria Math" panose="02040503050406030204" pitchFamily="18" charset="0"/>
                               </a:rPr>
                             </m:ctrlPr>
@@ -9229,7 +9279,7 @@
                             <m:func>
                               <m:funcPr>
                                 <m:ctrlPr>
-                                  <a:rPr lang="en-US">
+                                  <a:rPr lang="en-US" i="1">
                                     <a:latin typeface="Cambria Math" panose="02040503050406030204" pitchFamily="18" charset="0"/>
                                   </a:rPr>
                                 </m:ctrlPr>
@@ -9381,7 +9431,7 @@
                     <m:func>
                       <m:funcPr>
                         <m:ctrlPr>
-                          <a:rPr lang="en-US" b="0" i="0" smtClean="0">
+                          <a:rPr lang="en-US" b="0" i="1" smtClean="0">
                             <a:latin typeface="Cambria Math" panose="02040503050406030204" pitchFamily="18" charset="0"/>
                           </a:rPr>
                         </m:ctrlPr>
@@ -9435,7 +9485,7 @@
                                       <a:rPr lang="en-US" b="0" i="1" smtClean="0">
                                         <a:latin typeface="Cambria Math" panose="02040503050406030204" pitchFamily="18" charset="0"/>
                                       </a:rPr>
-                                      <m:t>ℎ</m:t>
+                                      <m:t>h</m:t>
                                     </m:r>
                                   </m:e>
                                   <m:sub>
@@ -9493,7 +9543,7 @@
                     <m:func>
                       <m:funcPr>
                         <m:ctrlPr>
-                          <a:rPr lang="en-US">
+                          <a:rPr lang="en-US" i="1">
                             <a:latin typeface="Cambria Math" panose="02040503050406030204" pitchFamily="18" charset="0"/>
                           </a:rPr>
                         </m:ctrlPr>
@@ -9531,7 +9581,7 @@
                                 <m:func>
                                   <m:funcPr>
                                     <m:ctrlPr>
-                                      <a:rPr lang="en-US">
+                                      <a:rPr lang="en-US" i="1">
                                         <a:latin typeface="Cambria Math" panose="02040503050406030204" pitchFamily="18" charset="0"/>
                                       </a:rPr>
                                     </m:ctrlPr>
@@ -9570,7 +9620,7 @@
                                               <a:rPr lang="en-US" i="1">
                                                 <a:latin typeface="Cambria Math" panose="02040503050406030204" pitchFamily="18" charset="0"/>
                                               </a:rPr>
-                                              <m:t>ℎ</m:t>
+                                              <m:t>h</m:t>
                                             </m:r>
                                           </m:e>
                                           <m:sub>
@@ -9663,7 +9713,7 @@
                                     <m:func>
                                       <m:funcPr>
                                         <m:ctrlPr>
-                                          <a:rPr lang="en-US">
+                                          <a:rPr lang="en-US" i="1">
                                             <a:latin typeface="Cambria Math" panose="02040503050406030204" pitchFamily="18" charset="0"/>
                                           </a:rPr>
                                         </m:ctrlPr>
@@ -9702,7 +9752,7 @@
                                                   <a:rPr lang="en-US" i="1">
                                                     <a:latin typeface="Cambria Math" panose="02040503050406030204" pitchFamily="18" charset="0"/>
                                                   </a:rPr>
-                                                  <m:t>ℎ</m:t>
+                                                  <m:t>h</m:t>
                                                 </m:r>
                                               </m:e>
                                               <m:sub>
@@ -9771,7 +9821,7 @@
                     <m:func>
                       <m:funcPr>
                         <m:ctrlPr>
-                          <a:rPr lang="en-US">
+                          <a:rPr lang="en-US" i="1">
                             <a:latin typeface="Cambria Math" panose="02040503050406030204" pitchFamily="18" charset="0"/>
                           </a:rPr>
                         </m:ctrlPr>
@@ -9836,7 +9886,7 @@
                                 <m:func>
                                   <m:funcPr>
                                     <m:ctrlPr>
-                                      <a:rPr lang="en-US">
+                                      <a:rPr lang="en-US" i="1">
                                         <a:latin typeface="Cambria Math" panose="02040503050406030204" pitchFamily="18" charset="0"/>
                                       </a:rPr>
                                     </m:ctrlPr>
@@ -9875,7 +9925,7 @@
                                               <a:rPr lang="en-US" i="1">
                                                 <a:latin typeface="Cambria Math" panose="02040503050406030204" pitchFamily="18" charset="0"/>
                                               </a:rPr>
-                                              <m:t>ℎ</m:t>
+                                              <m:t>h</m:t>
                                             </m:r>
                                           </m:e>
                                           <m:sub>
@@ -9952,7 +10002,7 @@
                           <a:rPr lang="en-US" i="1">
                             <a:latin typeface="Cambria Math" panose="02040503050406030204" pitchFamily="18" charset="0"/>
                           </a:rPr>
-                          <m:t>ℎ</m:t>
+                          <m:t>h</m:t>
                         </m:r>
                       </m:e>
                       <m:sub>
@@ -10043,7 +10093,7 @@
                               <a:rPr lang="en-US" i="1">
                                 <a:latin typeface="Cambria Math" panose="02040503050406030204" pitchFamily="18" charset="0"/>
                               </a:rPr>
-                              <m:t>ℎ</m:t>
+                              <m:t>h</m:t>
                             </m:r>
                           </m:e>
                           <m:sub>
@@ -10125,7 +10175,7 @@
                                   <a:rPr lang="en-US" i="1">
                                     <a:latin typeface="Cambria Math" panose="02040503050406030204" pitchFamily="18" charset="0"/>
                                   </a:rPr>
-                                  <m:t>ℎ</m:t>
+                                  <m:t>h</m:t>
                                 </m:r>
                               </m:e>
                               <m:sub>
@@ -10421,6 +10471,57 @@
           </a:p>
         </p:txBody>
       </p:sp>
+      <mc:AlternateContent xmlns:mc="http://schemas.openxmlformats.org/markup-compatibility/2006">
+        <mc:Choice xmlns:p14="http://schemas.microsoft.com/office/powerpoint/2010/main" Requires="p14">
+          <p:contentPart p14:bwMode="auto" r:id="rId4">
+            <p14:nvContentPartPr>
+              <p14:cNvPr id="8" name="Ink 7">
+                <a:extLst>
+                  <a:ext uri="{FF2B5EF4-FFF2-40B4-BE49-F238E27FC236}">
+                    <a16:creationId xmlns:a16="http://schemas.microsoft.com/office/drawing/2014/main" id="{5AC0B550-D816-4562-947B-E6C7C255C565}"/>
+                  </a:ext>
+                </a:extLst>
+              </p14:cNvPr>
+              <p14:cNvContentPartPr/>
+              <p14:nvPr/>
+            </p14:nvContentPartPr>
+            <p14:xfrm>
+              <a:off x="8549568" y="5339952"/>
+              <a:ext cx="360" cy="360"/>
+            </p14:xfrm>
+          </p:contentPart>
+        </mc:Choice>
+        <mc:Fallback>
+          <p:pic>
+            <p:nvPicPr>
+              <p:cNvPr id="8" name="Ink 7">
+                <a:extLst>
+                  <a:ext uri="{FF2B5EF4-FFF2-40B4-BE49-F238E27FC236}">
+                    <a16:creationId xmlns:a16="http://schemas.microsoft.com/office/drawing/2014/main" id="{5AC0B550-D816-4562-947B-E6C7C255C565}"/>
+                  </a:ext>
+                </a:extLst>
+              </p:cNvPr>
+              <p:cNvPicPr/>
+              <p:nvPr/>
+            </p:nvPicPr>
+            <p:blipFill>
+              <a:blip r:embed="rId5"/>
+              <a:stretch>
+                <a:fillRect/>
+              </a:stretch>
+            </p:blipFill>
+            <p:spPr>
+              <a:xfrm>
+                <a:off x="8540568" y="5330952"/>
+                <a:ext cx="18000" cy="18000"/>
+              </a:xfrm>
+              <a:prstGeom prst="rect">
+                <a:avLst/>
+              </a:prstGeom>
+            </p:spPr>
+          </p:pic>
+        </mc:Fallback>
+      </mc:AlternateContent>
     </p:spTree>
     <p:extLst>
       <p:ext uri="{BB962C8B-B14F-4D97-AF65-F5344CB8AC3E}">
@@ -10535,7 +10636,7 @@
                           <a:rPr lang="en-US" i="1">
                             <a:latin typeface="Cambria Math" panose="02040503050406030204" pitchFamily="18" charset="0"/>
                           </a:rPr>
-                          <m:t>ℎ</m:t>
+                          <m:t>h</m:t>
                         </m:r>
                       </m:e>
                       <m:sub>
@@ -10945,7 +11046,7 @@
                     <m:func>
                       <m:funcPr>
                         <m:ctrlPr>
-                          <a:rPr lang="en-US" b="0" i="0" smtClean="0">
+                          <a:rPr lang="en-US" b="0" i="1" smtClean="0">
                             <a:solidFill>
                               <a:srgbClr val="C00000"/>
                             </a:solidFill>
@@ -12145,7 +12246,10 @@
                 <a:pPr/>
                 <a14:m>
                   <m:oMathPara xmlns:m="http://schemas.openxmlformats.org/officeDocument/2006/math">
-                    <m:oMath>
+                    <m:oMathParaPr>
+                      <m:jc m:val="centerGroup"/>
+                    </m:oMathParaPr>
+                    <m:oMath xmlns:m="http://schemas.openxmlformats.org/officeDocument/2006/math">
                       <m:r>
                         <a:rPr lang="en-US" sz="1600" b="0" i="1" dirty="0" smtClean="0">
                           <a:latin typeface="Cambria Math" panose="02040503050406030204" pitchFamily="18" charset="0"/>
@@ -12184,7 +12288,10 @@
                 <a:pPr/>
                 <a14:m>
                   <m:oMathPara xmlns:m="http://schemas.openxmlformats.org/officeDocument/2006/math">
-                    <m:oMath>
+                    <m:oMathParaPr>
+                      <m:jc m:val="centerGroup"/>
+                    </m:oMathParaPr>
+                    <m:oMath xmlns:m="http://schemas.openxmlformats.org/officeDocument/2006/math">
                       <m:r>
                         <a:rPr lang="en-US" sz="1600" b="0" i="1" dirty="0" smtClean="0">
                           <a:latin typeface="Cambria Math" panose="02040503050406030204" pitchFamily="18" charset="0"/>
@@ -12223,7 +12330,10 @@
                 <a:pPr/>
                 <a14:m>
                   <m:oMathPara xmlns:m="http://schemas.openxmlformats.org/officeDocument/2006/math">
-                    <m:oMath>
+                    <m:oMathParaPr>
+                      <m:jc m:val="centerGroup"/>
+                    </m:oMathParaPr>
+                    <m:oMath xmlns:m="http://schemas.openxmlformats.org/officeDocument/2006/math">
                       <m:r>
                         <a:rPr lang="en-US" sz="1600" b="0" i="1" dirty="0" smtClean="0">
                           <a:latin typeface="Cambria Math" panose="02040503050406030204" pitchFamily="18" charset="0"/>
@@ -12262,7 +12372,10 @@
                 <a:pPr/>
                 <a14:m>
                   <m:oMathPara xmlns:m="http://schemas.openxmlformats.org/officeDocument/2006/math">
-                    <m:oMath>
+                    <m:oMathParaPr>
+                      <m:jc m:val="centerGroup"/>
+                    </m:oMathParaPr>
+                    <m:oMath xmlns:m="http://schemas.openxmlformats.org/officeDocument/2006/math">
                       <m:r>
                         <a:rPr lang="en-US" sz="1600" b="0" i="1" dirty="0" smtClean="0">
                           <a:latin typeface="Cambria Math" panose="02040503050406030204" pitchFamily="18" charset="0"/>
@@ -12301,7 +12414,10 @@
                 <a:pPr/>
                 <a14:m>
                   <m:oMathPara xmlns:m="http://schemas.openxmlformats.org/officeDocument/2006/math">
-                    <m:oMath>
+                    <m:oMathParaPr>
+                      <m:jc m:val="centerGroup"/>
+                    </m:oMathParaPr>
+                    <m:oMath xmlns:m="http://schemas.openxmlformats.org/officeDocument/2006/math">
                       <m:r>
                         <a:rPr lang="en-US" sz="1600" b="0" i="1" dirty="0" smtClean="0">
                           <a:latin typeface="Cambria Math" panose="02040503050406030204" pitchFamily="18" charset="0"/>
@@ -12340,7 +12456,10 @@
                 <a:pPr/>
                 <a14:m>
                   <m:oMathPara xmlns:m="http://schemas.openxmlformats.org/officeDocument/2006/math">
-                    <m:oMath>
+                    <m:oMathParaPr>
+                      <m:jc m:val="centerGroup"/>
+                    </m:oMathParaPr>
+                    <m:oMath xmlns:m="http://schemas.openxmlformats.org/officeDocument/2006/math">
                       <m:r>
                         <a:rPr lang="en-US" sz="1600" b="0" i="1" dirty="0" smtClean="0">
                           <a:latin typeface="Cambria Math" panose="02040503050406030204" pitchFamily="18" charset="0"/>
@@ -12379,7 +12498,10 @@
                 <a:pPr/>
                 <a14:m>
                   <m:oMathPara xmlns:m="http://schemas.openxmlformats.org/officeDocument/2006/math">
-                    <m:oMath>
+                    <m:oMathParaPr>
+                      <m:jc m:val="centerGroup"/>
+                    </m:oMathParaPr>
+                    <m:oMath xmlns:m="http://schemas.openxmlformats.org/officeDocument/2006/math">
                       <m:r>
                         <a:rPr lang="en-US" sz="1600" b="0" i="1" dirty="0" smtClean="0">
                           <a:latin typeface="Cambria Math" panose="02040503050406030204" pitchFamily="18" charset="0"/>
@@ -12418,7 +12540,10 @@
                 <a:pPr/>
                 <a14:m>
                   <m:oMathPara xmlns:m="http://schemas.openxmlformats.org/officeDocument/2006/math">
-                    <m:oMath>
+                    <m:oMathParaPr>
+                      <m:jc m:val="centerGroup"/>
+                    </m:oMathParaPr>
+                    <m:oMath xmlns:m="http://schemas.openxmlformats.org/officeDocument/2006/math">
                       <m:r>
                         <a:rPr lang="en-US" sz="1600" b="0" i="1" dirty="0" smtClean="0">
                           <a:latin typeface="Cambria Math" panose="02040503050406030204" pitchFamily="18" charset="0"/>
@@ -12457,7 +12582,10 @@
                 <a:pPr/>
                 <a14:m>
                   <m:oMathPara xmlns:m="http://schemas.openxmlformats.org/officeDocument/2006/math">
-                    <m:oMath>
+                    <m:oMathParaPr>
+                      <m:jc m:val="centerGroup"/>
+                    </m:oMathParaPr>
+                    <m:oMath xmlns:m="http://schemas.openxmlformats.org/officeDocument/2006/math">
                       <m:r>
                         <a:rPr lang="en-US" sz="1600" b="0" i="1" dirty="0" smtClean="0">
                           <a:solidFill>
@@ -12512,7 +12640,10 @@
                 <a:pPr/>
                 <a14:m>
                   <m:oMathPara xmlns:m="http://schemas.openxmlformats.org/officeDocument/2006/math">
-                    <m:oMath>
+                    <m:oMathParaPr>
+                      <m:jc m:val="centerGroup"/>
+                    </m:oMathParaPr>
+                    <m:oMath xmlns:m="http://schemas.openxmlformats.org/officeDocument/2006/math">
                       <m:r>
                         <a:rPr lang="en-US" sz="1600" b="0" i="1" dirty="0" smtClean="0">
                           <a:latin typeface="Cambria Math" panose="02040503050406030204" pitchFamily="18" charset="0"/>
@@ -13761,7 +13892,7 @@
                     <m:f>
                       <m:fPr>
                         <m:ctrlPr>
-                          <a:rPr lang="en-US" i="0">
+                          <a:rPr lang="en-US" i="1">
                             <a:latin typeface="Cambria Math" panose="02040503050406030204" pitchFamily="18" charset="0"/>
                           </a:rPr>
                         </m:ctrlPr>
@@ -13796,7 +13927,7 @@
                         <m:d>
                           <m:dPr>
                             <m:ctrlPr>
-                              <a:rPr lang="en-US" i="0">
+                              <a:rPr lang="en-US" i="1">
                                 <a:latin typeface="Cambria Math" panose="02040503050406030204" pitchFamily="18" charset="0"/>
                               </a:rPr>
                             </m:ctrlPr>
@@ -20453,7 +20584,10 @@
                   <a:pPr algn="l"/>
                   <a14:m>
                     <m:oMathPara xmlns:m="http://schemas.openxmlformats.org/officeDocument/2006/math">
-                      <m:oMath>
+                      <m:oMathParaPr>
+                        <m:jc m:val="centerGroup"/>
+                      </m:oMathParaPr>
+                      <m:oMath xmlns:m="http://schemas.openxmlformats.org/officeDocument/2006/math">
                         <m:r>
                           <a:rPr lang="en-US" b="1" i="1" smtClean="0">
                             <a:latin typeface="Cambria Math" panose="02040503050406030204" pitchFamily="18" charset="0"/>
@@ -20546,7 +20680,10 @@
                   <a:pPr algn="l"/>
                   <a14:m>
                     <m:oMathPara xmlns:m="http://schemas.openxmlformats.org/officeDocument/2006/math">
-                      <m:oMath>
+                      <m:oMathParaPr>
+                        <m:jc m:val="centerGroup"/>
+                      </m:oMathParaPr>
+                      <m:oMath xmlns:m="http://schemas.openxmlformats.org/officeDocument/2006/math">
                         <m:r>
                           <a:rPr lang="en-US" b="0" i="1" smtClean="0">
                             <a:latin typeface="Cambria Math" panose="02040503050406030204" pitchFamily="18" charset="0"/>
@@ -20639,7 +20776,10 @@
                   <a:pPr algn="l"/>
                   <a14:m>
                     <m:oMathPara xmlns:m="http://schemas.openxmlformats.org/officeDocument/2006/math">
-                      <m:oMath>
+                      <m:oMathParaPr>
+                        <m:jc m:val="centerGroup"/>
+                      </m:oMathParaPr>
+                      <m:oMath xmlns:m="http://schemas.openxmlformats.org/officeDocument/2006/math">
                         <m:r>
                           <a:rPr lang="en-US" b="1" i="1" smtClean="0">
                             <a:latin typeface="Cambria Math" panose="02040503050406030204" pitchFamily="18" charset="0"/>
@@ -20806,7 +20946,10 @@
                   <a:pPr/>
                   <a14:m>
                     <m:oMathPara xmlns:m="http://schemas.openxmlformats.org/officeDocument/2006/math">
-                      <m:oMath>
+                      <m:oMathParaPr>
+                        <m:jc m:val="centerGroup"/>
+                      </m:oMathParaPr>
+                      <m:oMath xmlns:m="http://schemas.openxmlformats.org/officeDocument/2006/math">
                         <m:r>
                           <a:rPr lang="en-US" b="1" i="1">
                             <a:latin typeface="Cambria Math" panose="02040503050406030204" pitchFamily="18" charset="0"/>
@@ -21270,7 +21413,10 @@
                     <a:pPr/>
                     <a14:m>
                       <m:oMathPara xmlns:m="http://schemas.openxmlformats.org/officeDocument/2006/math">
-                        <m:oMath>
+                        <m:oMathParaPr>
+                          <m:jc m:val="centerGroup"/>
+                        </m:oMathParaPr>
+                        <m:oMath xmlns:m="http://schemas.openxmlformats.org/officeDocument/2006/math">
                           <m:r>
                             <a:rPr lang="en-US" b="0" i="1">
                               <a:latin typeface="Cambria Math" panose="02040503050406030204" pitchFamily="18" charset="0"/>
@@ -21390,7 +21536,10 @@
                     <a:pPr/>
                     <a14:m>
                       <m:oMathPara xmlns:m="http://schemas.openxmlformats.org/officeDocument/2006/math">
-                        <m:oMath>
+                        <m:oMathParaPr>
+                          <m:jc m:val="centerGroup"/>
+                        </m:oMathParaPr>
+                        <m:oMath xmlns:m="http://schemas.openxmlformats.org/officeDocument/2006/math">
                           <m:r>
                             <a:rPr lang="en-US" b="0" i="1" smtClean="0">
                               <a:latin typeface="Cambria Math" panose="02040503050406030204" pitchFamily="18" charset="0"/>
@@ -21510,7 +21659,10 @@
                     <a:pPr/>
                     <a14:m>
                       <m:oMathPara xmlns:m="http://schemas.openxmlformats.org/officeDocument/2006/math">
-                        <m:oMath>
+                        <m:oMathParaPr>
+                          <m:jc m:val="centerGroup"/>
+                        </m:oMathParaPr>
+                        <m:oMath xmlns:m="http://schemas.openxmlformats.org/officeDocument/2006/math">
                           <m:r>
                             <a:rPr lang="en-US" b="0" i="1" smtClean="0">
                               <a:latin typeface="Cambria Math" panose="02040503050406030204" pitchFamily="18" charset="0"/>
@@ -21630,7 +21782,10 @@
                     <a:pPr/>
                     <a14:m>
                       <m:oMathPara xmlns:m="http://schemas.openxmlformats.org/officeDocument/2006/math">
-                        <m:oMath>
+                        <m:oMathParaPr>
+                          <m:jc m:val="centerGroup"/>
+                        </m:oMathParaPr>
+                        <m:oMath xmlns:m="http://schemas.openxmlformats.org/officeDocument/2006/math">
                           <m:r>
                             <a:rPr lang="en-US" b="0" i="1" smtClean="0">
                               <a:latin typeface="Cambria Math" panose="02040503050406030204" pitchFamily="18" charset="0"/>
@@ -21792,7 +21947,10 @@
                     <a:pPr algn="ctr"/>
                     <a14:m>
                       <m:oMathPara xmlns:m="http://schemas.openxmlformats.org/officeDocument/2006/math">
-                        <m:oMath>
+                        <m:oMathParaPr>
+                          <m:jc m:val="centerGroup"/>
+                        </m:oMathParaPr>
+                        <m:oMath xmlns:m="http://schemas.openxmlformats.org/officeDocument/2006/math">
                           <m:r>
                             <a:rPr lang="en-US" sz="1600" b="0" i="1" smtClean="0">
                               <a:latin typeface="Cambria Math" panose="02040503050406030204" pitchFamily="18" charset="0"/>
@@ -21832,7 +21990,10 @@
                     <a:pPr algn="ctr"/>
                     <a14:m>
                       <m:oMathPara xmlns:m="http://schemas.openxmlformats.org/officeDocument/2006/math">
-                        <m:oMath>
+                        <m:oMathParaPr>
+                          <m:jc m:val="centerGroup"/>
+                        </m:oMathParaPr>
+                        <m:oMath xmlns:m="http://schemas.openxmlformats.org/officeDocument/2006/math">
                           <m:r>
                             <a:rPr lang="en-US" sz="1600" b="0" i="1" smtClean="0">
                               <a:latin typeface="Cambria Math" panose="02040503050406030204" pitchFamily="18" charset="0"/>
@@ -22307,7 +22468,7 @@
                     <m:sSub>
                       <m:sSubPr>
                         <m:ctrlPr>
-                          <a:rPr lang="en-US" b="0" i="0" smtClean="0">
+                          <a:rPr lang="en-US" b="0" i="1" smtClean="0">
                             <a:solidFill>
                               <a:schemeClr val="tx1"/>
                             </a:solidFill>
@@ -22669,7 +22830,10 @@
                   <a:pPr/>
                   <a14:m>
                     <m:oMathPara xmlns:m="http://schemas.openxmlformats.org/officeDocument/2006/math">
-                      <m:oMath>
+                      <m:oMathParaPr>
+                        <m:jc m:val="centerGroup"/>
+                      </m:oMathParaPr>
+                      <m:oMath xmlns:m="http://schemas.openxmlformats.org/officeDocument/2006/math">
                         <m:sSub>
                           <m:sSubPr>
                             <m:ctrlPr>
@@ -23529,7 +23693,10 @@
                 </a:pPr>
                 <a14:m>
                   <m:oMathPara xmlns:m="http://schemas.openxmlformats.org/officeDocument/2006/math">
-                    <m:oMath>
+                    <m:oMathParaPr>
+                      <m:jc m:val="centerGroup"/>
+                    </m:oMathParaPr>
+                    <m:oMath xmlns:m="http://schemas.openxmlformats.org/officeDocument/2006/math">
                       <m:sSub>
                         <m:sSubPr>
                           <m:ctrlPr>
@@ -23753,7 +23920,10 @@
                 </a:pPr>
                 <a14:m>
                   <m:oMathPara xmlns:m="http://schemas.openxmlformats.org/officeDocument/2006/math">
-                    <m:oMath>
+                    <m:oMathParaPr>
+                      <m:jc m:val="centerGroup"/>
+                    </m:oMathParaPr>
+                    <m:oMath xmlns:m="http://schemas.openxmlformats.org/officeDocument/2006/math">
                       <m:sSub>
                         <m:sSubPr>
                           <m:ctrlPr>
@@ -23871,7 +24041,10 @@
                 <a:pPr/>
                 <a14:m>
                   <m:oMathPara xmlns:m="http://schemas.openxmlformats.org/officeDocument/2006/math">
-                    <m:oMath>
+                    <m:oMathParaPr>
+                      <m:jc m:val="centerGroup"/>
+                    </m:oMathParaPr>
+                    <m:oMath xmlns:m="http://schemas.openxmlformats.org/officeDocument/2006/math">
                       <m:r>
                         <a:rPr lang="en-US" i="1" smtClean="0">
                           <a:latin typeface="Cambria Math" panose="02040503050406030204" pitchFamily="18" charset="0"/>
@@ -26522,8 +26695,8 @@
           </a:p>
         </p:txBody>
       </p:sp>
-      <mc:AlternateContent xmlns:mc="http://schemas.openxmlformats.org/markup-compatibility/2006" xmlns:a14="http://schemas.microsoft.com/office/drawing/2010/main">
-        <mc:Choice Requires="a14">
+      <mc:AlternateContent xmlns:mc="http://schemas.openxmlformats.org/markup-compatibility/2006">
+        <mc:Choice xmlns:a14="http://schemas.microsoft.com/office/drawing/2010/main" Requires="a14">
           <p:sp>
             <p:nvSpPr>
               <p:cNvPr id="3" name="Content Placeholder 2">
@@ -26548,7 +26721,7 @@
             </p:spPr>
             <p:txBody>
               <a:bodyPr>
-                <a:normAutofit fontScale="85000" lnSpcReduction="10000"/>
+                <a:normAutofit fontScale="77500" lnSpcReduction="20000"/>
               </a:bodyPr>
               <a:lstStyle/>
               <a:p>
@@ -26755,10 +26928,25 @@
                   <a:t>has a low effective dimension. Fig. 1 illustrates how point grids and uniformly random point sets differ in how they cope with low effective dimensionality</a:t>
                 </a:r>
               </a:p>
+              <a:p>
+                <a:r>
+                  <a:rPr lang="en-US" dirty="0" err="1"/>
+                  <a:t>Bergstra</a:t>
+                </a:r>
+                <a:r>
+                  <a:rPr lang="en-US" dirty="0"/>
+                  <a:t> et al argued for random search for hyper-parameter optimization instead of </a:t>
+                </a:r>
+                <a:r>
+                  <a:rPr lang="en-US"/>
+                  <a:t>grid search</a:t>
+                </a:r>
+                <a:endParaRPr lang="en-US" dirty="0"/>
+              </a:p>
             </p:txBody>
           </p:sp>
         </mc:Choice>
-        <mc:Fallback xmlns="">
+        <mc:Fallback>
           <p:sp>
             <p:nvSpPr>
               <p:cNvPr id="3" name="Content Placeholder 2">
@@ -26783,7 +26971,7 @@
               <a:blipFill>
                 <a:blip r:embed="rId2"/>
                 <a:stretch>
-                  <a:fillRect l="-2063" t="-2357" r="-3277"/>
+                  <a:fillRect l="-1699" t="-2694"/>
                 </a:stretch>
               </a:blipFill>
             </p:spPr>
@@ -26792,7 +26980,7 @@
               <a:lstStyle/>
               <a:p>
                 <a:r>
-                  <a:rPr lang="en-SE">
+                  <a:rPr lang="en-US">
                     <a:noFill/>
                   </a:rPr>
                   <a:t> </a:t>
@@ -30953,7 +31141,10 @@
                           <a:pPr/>
                           <a14:m>
                             <m:oMathPara xmlns:m="http://schemas.openxmlformats.org/officeDocument/2006/math">
-                              <m:oMath>
+                              <m:oMathParaPr>
+                                <m:jc m:val="centerGroup"/>
+                              </m:oMathParaPr>
+                              <m:oMath xmlns:m="http://schemas.openxmlformats.org/officeDocument/2006/math">
                                 <m:sSub>
                                   <m:sSubPr>
                                     <m:ctrlPr>
@@ -31008,7 +31199,10 @@
                           <a:pPr/>
                           <a14:m>
                             <m:oMathPara xmlns:m="http://schemas.openxmlformats.org/officeDocument/2006/math">
-                              <m:oMath>
+                              <m:oMathParaPr>
+                                <m:jc m:val="centerGroup"/>
+                              </m:oMathParaPr>
+                              <m:oMath xmlns:m="http://schemas.openxmlformats.org/officeDocument/2006/math">
                                 <m:sSub>
                                   <m:sSubPr>
                                     <m:ctrlPr>
@@ -31063,7 +31257,10 @@
                           <a:pPr/>
                           <a14:m>
                             <m:oMathPara xmlns:m="http://schemas.openxmlformats.org/officeDocument/2006/math">
-                              <m:oMath>
+                              <m:oMathParaPr>
+                                <m:jc m:val="centerGroup"/>
+                              </m:oMathParaPr>
+                              <m:oMath xmlns:m="http://schemas.openxmlformats.org/officeDocument/2006/math">
                                 <m:r>
                                   <a:rPr lang="en-US" sz="1900" b="1" i="1" smtClean="0">
                                     <a:solidFill>
@@ -31100,7 +31297,10 @@
                           <a:pPr/>
                           <a14:m>
                             <m:oMathPara xmlns:m="http://schemas.openxmlformats.org/officeDocument/2006/math">
-                              <m:oMath>
+                              <m:oMathParaPr>
+                                <m:jc m:val="centerGroup"/>
+                              </m:oMathParaPr>
+                              <m:oMath xmlns:m="http://schemas.openxmlformats.org/officeDocument/2006/math">
                                 <m:r>
                                   <a:rPr lang="en-US" sz="1900" b="0" i="1" smtClean="0">
                                     <a:latin typeface="Cambria Math" panose="02040503050406030204" pitchFamily="18" charset="0"/>
@@ -31123,7 +31323,10 @@
                           <a:pPr/>
                           <a14:m>
                             <m:oMathPara xmlns:m="http://schemas.openxmlformats.org/officeDocument/2006/math">
-                              <m:oMath>
+                              <m:oMathParaPr>
+                                <m:jc m:val="centerGroup"/>
+                              </m:oMathParaPr>
+                              <m:oMath xmlns:m="http://schemas.openxmlformats.org/officeDocument/2006/math">
                                 <m:r>
                                   <a:rPr lang="en-US" sz="1900" b="0" i="1" smtClean="0">
                                     <a:latin typeface="Cambria Math" panose="02040503050406030204" pitchFamily="18" charset="0"/>
@@ -31146,7 +31349,10 @@
                           <a:pPr/>
                           <a14:m>
                             <m:oMathPara xmlns:m="http://schemas.openxmlformats.org/officeDocument/2006/math">
-                              <m:oMath>
+                              <m:oMathParaPr>
+                                <m:jc m:val="centerGroup"/>
+                              </m:oMathParaPr>
+                              <m:oMath xmlns:m="http://schemas.openxmlformats.org/officeDocument/2006/math">
                                 <m:r>
                                   <a:rPr lang="en-US" sz="1900" b="0" i="1" smtClean="0">
                                     <a:latin typeface="Cambria Math" panose="02040503050406030204" pitchFamily="18" charset="0"/>
@@ -31176,7 +31382,10 @@
                           <a:pPr/>
                           <a14:m>
                             <m:oMathPara xmlns:m="http://schemas.openxmlformats.org/officeDocument/2006/math">
-                              <m:oMath>
+                              <m:oMathParaPr>
+                                <m:jc m:val="centerGroup"/>
+                              </m:oMathParaPr>
+                              <m:oMath xmlns:m="http://schemas.openxmlformats.org/officeDocument/2006/math">
                                 <m:r>
                                   <a:rPr lang="en-US" sz="1900" b="0" i="1" smtClean="0">
                                     <a:latin typeface="Cambria Math" panose="02040503050406030204" pitchFamily="18" charset="0"/>
@@ -31199,7 +31408,10 @@
                           <a:pPr/>
                           <a14:m>
                             <m:oMathPara xmlns:m="http://schemas.openxmlformats.org/officeDocument/2006/math">
-                              <m:oMath>
+                              <m:oMathParaPr>
+                                <m:jc m:val="centerGroup"/>
+                              </m:oMathParaPr>
+                              <m:oMath xmlns:m="http://schemas.openxmlformats.org/officeDocument/2006/math">
                                 <m:r>
                                   <a:rPr lang="en-US" sz="1900" b="0" i="1" smtClean="0">
                                     <a:latin typeface="Cambria Math" panose="02040503050406030204" pitchFamily="18" charset="0"/>
@@ -31222,7 +31434,10 @@
                           <a:pPr/>
                           <a14:m>
                             <m:oMathPara xmlns:m="http://schemas.openxmlformats.org/officeDocument/2006/math">
-                              <m:oMath>
+                              <m:oMathParaPr>
+                                <m:jc m:val="centerGroup"/>
+                              </m:oMathParaPr>
+                              <m:oMath xmlns:m="http://schemas.openxmlformats.org/officeDocument/2006/math">
                                 <m:r>
                                   <a:rPr lang="en-US" sz="1900" b="0" i="1" smtClean="0">
                                     <a:latin typeface="Cambria Math" panose="02040503050406030204" pitchFamily="18" charset="0"/>
@@ -31252,7 +31467,10 @@
                           <a:pPr/>
                           <a14:m>
                             <m:oMathPara xmlns:m="http://schemas.openxmlformats.org/officeDocument/2006/math">
-                              <m:oMath>
+                              <m:oMathParaPr>
+                                <m:jc m:val="centerGroup"/>
+                              </m:oMathParaPr>
+                              <m:oMath xmlns:m="http://schemas.openxmlformats.org/officeDocument/2006/math">
                                 <m:r>
                                   <a:rPr lang="en-US" sz="1900" b="0" i="1" smtClean="0">
                                     <a:latin typeface="Cambria Math" panose="02040503050406030204" pitchFamily="18" charset="0"/>
@@ -31275,7 +31493,10 @@
                           <a:pPr/>
                           <a14:m>
                             <m:oMathPara xmlns:m="http://schemas.openxmlformats.org/officeDocument/2006/math">
-                              <m:oMath>
+                              <m:oMathParaPr>
+                                <m:jc m:val="centerGroup"/>
+                              </m:oMathParaPr>
+                              <m:oMath xmlns:m="http://schemas.openxmlformats.org/officeDocument/2006/math">
                                 <m:r>
                                   <a:rPr lang="en-US" sz="1900" b="0" i="1" smtClean="0">
                                     <a:latin typeface="Cambria Math" panose="02040503050406030204" pitchFamily="18" charset="0"/>
@@ -31298,7 +31519,10 @@
                           <a:pPr/>
                           <a14:m>
                             <m:oMathPara xmlns:m="http://schemas.openxmlformats.org/officeDocument/2006/math">
-                              <m:oMath>
+                              <m:oMathParaPr>
+                                <m:jc m:val="centerGroup"/>
+                              </m:oMathParaPr>
+                              <m:oMath xmlns:m="http://schemas.openxmlformats.org/officeDocument/2006/math">
                                 <m:r>
                                   <a:rPr lang="en-US" sz="1900" b="0" i="1" smtClean="0">
                                     <a:latin typeface="Cambria Math" panose="02040503050406030204" pitchFamily="18" charset="0"/>
@@ -31328,7 +31552,10 @@
                           <a:pPr/>
                           <a14:m>
                             <m:oMathPara xmlns:m="http://schemas.openxmlformats.org/officeDocument/2006/math">
-                              <m:oMath>
+                              <m:oMathParaPr>
+                                <m:jc m:val="centerGroup"/>
+                              </m:oMathParaPr>
+                              <m:oMath xmlns:m="http://schemas.openxmlformats.org/officeDocument/2006/math">
                                 <m:r>
                                   <a:rPr lang="en-US" sz="1900" b="0" i="1" smtClean="0">
                                     <a:latin typeface="Cambria Math" panose="02040503050406030204" pitchFamily="18" charset="0"/>
@@ -31351,7 +31578,10 @@
                           <a:pPr/>
                           <a14:m>
                             <m:oMathPara xmlns:m="http://schemas.openxmlformats.org/officeDocument/2006/math">
-                              <m:oMath>
+                              <m:oMathParaPr>
+                                <m:jc m:val="centerGroup"/>
+                              </m:oMathParaPr>
+                              <m:oMath xmlns:m="http://schemas.openxmlformats.org/officeDocument/2006/math">
                                 <m:r>
                                   <a:rPr lang="en-US" sz="1900" b="0" i="1" smtClean="0">
                                     <a:latin typeface="Cambria Math" panose="02040503050406030204" pitchFamily="18" charset="0"/>
@@ -31374,7 +31604,10 @@
                           <a:pPr/>
                           <a14:m>
                             <m:oMathPara xmlns:m="http://schemas.openxmlformats.org/officeDocument/2006/math">
-                              <m:oMath>
+                              <m:oMathParaPr>
+                                <m:jc m:val="centerGroup"/>
+                              </m:oMathParaPr>
+                              <m:oMath xmlns:m="http://schemas.openxmlformats.org/officeDocument/2006/math">
                                 <m:r>
                                   <a:rPr lang="en-US" sz="1900" b="0" i="1" smtClean="0">
                                     <a:latin typeface="Cambria Math" panose="02040503050406030204" pitchFamily="18" charset="0"/>
@@ -32649,6 +32882,15 @@
 </file>
 
 <file path=customXml/item1.xml><?xml version="1.0" encoding="utf-8"?>
+<p:properties xmlns:p="http://schemas.microsoft.com/office/2006/metadata/properties" xmlns:xsi="http://www.w3.org/2001/XMLSchema-instance" xmlns:pc="http://schemas.microsoft.com/office/infopath/2007/PartnerControls">
+  <documentManagement>
+    <_ip_UnifiedCompliancePolicyUIAction xmlns="http://schemas.microsoft.com/sharepoint/v3" xsi:nil="true"/>
+    <_ip_UnifiedCompliancePolicyProperties xmlns="http://schemas.microsoft.com/sharepoint/v3" xsi:nil="true"/>
+  </documentManagement>
+</p:properties>
+</file>
+
+<file path=customXml/item2.xml><?xml version="1.0" encoding="utf-8"?>
 <ct:contentTypeSchema xmlns:ct="http://schemas.microsoft.com/office/2006/metadata/contentType" xmlns:ma="http://schemas.microsoft.com/office/2006/metadata/properties/metaAttributes" ct:_="" ma:_="" ma:contentTypeName="Document" ma:contentTypeID="0x0101000DB1CA95448E8341BAC02D84F836706E" ma:contentTypeVersion="6" ma:contentTypeDescription="Create a new document." ma:contentTypeScope="" ma:versionID="2327688fe12e390352dabca167932040">
   <xsd:schema xmlns:xsd="http://www.w3.org/2001/XMLSchema" xmlns:xs="http://www.w3.org/2001/XMLSchema" xmlns:p="http://schemas.microsoft.com/office/2006/metadata/properties" xmlns:ns1="http://schemas.microsoft.com/sharepoint/v3" xmlns:ns2="1b5a303a-3c2d-46af-894d-5a63675fdf5d" xmlns:ns3="13bd0950-6268-4383-96fe-5fe3a48110ec" targetNamespace="http://schemas.microsoft.com/office/2006/metadata/properties" ma:root="true" ma:fieldsID="e90c3ecbaea61ae9ab22f72bf2f79284" ns1:_="" ns2:_="" ns3:_="">
     <xsd:import namespace="http://schemas.microsoft.com/sharepoint/v3"/>
@@ -32830,15 +33072,6 @@
 </ct:contentTypeSchema>
 </file>
 
-<file path=customXml/item2.xml><?xml version="1.0" encoding="utf-8"?>
-<p:properties xmlns:p="http://schemas.microsoft.com/office/2006/metadata/properties" xmlns:xsi="http://www.w3.org/2001/XMLSchema-instance" xmlns:pc="http://schemas.microsoft.com/office/infopath/2007/PartnerControls">
-  <documentManagement>
-    <_ip_UnifiedCompliancePolicyUIAction xmlns="http://schemas.microsoft.com/sharepoint/v3" xsi:nil="true"/>
-    <_ip_UnifiedCompliancePolicyProperties xmlns="http://schemas.microsoft.com/sharepoint/v3" xsi:nil="true"/>
-  </documentManagement>
-</p:properties>
-</file>
-
 <file path=customXml/item3.xml><?xml version="1.0" encoding="utf-8"?>
 <?mso-contentType ?>
 <FormTemplates xmlns="http://schemas.microsoft.com/sharepoint/v3/contenttype/forms">
@@ -32849,6 +33082,24 @@
 </file>
 
 <file path=customXml/itemProps1.xml><?xml version="1.0" encoding="utf-8"?>
+<ds:datastoreItem xmlns:ds="http://schemas.openxmlformats.org/officeDocument/2006/customXml" ds:itemID="{4642294E-F67E-4944-9A87-D5C631307A05}">
+  <ds:schemaRefs>
+    <ds:schemaRef ds:uri="13bd0950-6268-4383-96fe-5fe3a48110ec"/>
+    <ds:schemaRef ds:uri="1b5a303a-3c2d-46af-894d-5a63675fdf5d"/>
+    <ds:schemaRef ds:uri="http://purl.org/dc/dcmitype/"/>
+    <ds:schemaRef ds:uri="http://purl.org/dc/elements/1.1/"/>
+    <ds:schemaRef ds:uri="http://purl.org/dc/terms/"/>
+    <ds:schemaRef ds:uri="http://schemas.microsoft.com/office/2006/documentManagement/types"/>
+    <ds:schemaRef ds:uri="http://schemas.microsoft.com/office/2006/metadata/properties"/>
+    <ds:schemaRef ds:uri="http://schemas.microsoft.com/office/infopath/2007/PartnerControls"/>
+    <ds:schemaRef ds:uri="http://schemas.microsoft.com/sharepoint/v3"/>
+    <ds:schemaRef ds:uri="http://schemas.openxmlformats.org/package/2006/metadata/core-properties"/>
+    <ds:schemaRef ds:uri="http://www.w3.org/XML/1998/namespace"/>
+  </ds:schemaRefs>
+</ds:datastoreItem>
+</file>
+
+<file path=customXml/itemProps2.xml><?xml version="1.0" encoding="utf-8"?>
 <ds:datastoreItem xmlns:ds="http://schemas.openxmlformats.org/officeDocument/2006/customXml" ds:itemID="{68A2820C-4060-44E8-B56E-83EBBB666E7B}">
   <ds:schemaRefs>
     <ds:schemaRef ds:uri="13bd0950-6268-4383-96fe-5fe3a48110ec"/>
@@ -32868,24 +33119,6 @@
 </ds:datastoreItem>
 </file>
 
-<file path=customXml/itemProps2.xml><?xml version="1.0" encoding="utf-8"?>
-<ds:datastoreItem xmlns:ds="http://schemas.openxmlformats.org/officeDocument/2006/customXml" ds:itemID="{4642294E-F67E-4944-9A87-D5C631307A05}">
-  <ds:schemaRefs>
-    <ds:schemaRef ds:uri="13bd0950-6268-4383-96fe-5fe3a48110ec"/>
-    <ds:schemaRef ds:uri="1b5a303a-3c2d-46af-894d-5a63675fdf5d"/>
-    <ds:schemaRef ds:uri="http://purl.org/dc/dcmitype/"/>
-    <ds:schemaRef ds:uri="http://purl.org/dc/elements/1.1/"/>
-    <ds:schemaRef ds:uri="http://purl.org/dc/terms/"/>
-    <ds:schemaRef ds:uri="http://schemas.microsoft.com/office/2006/documentManagement/types"/>
-    <ds:schemaRef ds:uri="http://schemas.microsoft.com/office/2006/metadata/properties"/>
-    <ds:schemaRef ds:uri="http://schemas.microsoft.com/office/infopath/2007/PartnerControls"/>
-    <ds:schemaRef ds:uri="http://schemas.microsoft.com/sharepoint/v3"/>
-    <ds:schemaRef ds:uri="http://schemas.openxmlformats.org/package/2006/metadata/core-properties"/>
-    <ds:schemaRef ds:uri="http://www.w3.org/XML/1998/namespace"/>
-  </ds:schemaRefs>
-</ds:datastoreItem>
-</file>
-
 <file path=customXml/itemProps3.xml><?xml version="1.0" encoding="utf-8"?>
 <ds:datastoreItem xmlns:ds="http://schemas.openxmlformats.org/officeDocument/2006/customXml" ds:itemID="{AC991D47-3926-48A1-8BC1-320FB99AB8DB}">
   <ds:schemaRefs>

--- a/PPTs/L2 Intro to ML.pptx
+++ b/PPTs/L2 Intro to ML.pptx
@@ -302,7 +302,7 @@
           <a:p>
             <a:fld id="{A2B3DE59-F14A-BE48-A4BD-826E6AEB8CEC}" type="datetimeFigureOut">
               <a:rPr lang="en-US" smtClean="0"/>
-              <a:t>9/21/2026</a:t>
+              <a:t>10/7/2026</a:t>
             </a:fld>
             <a:endParaRPr lang="en-US"/>
           </a:p>
@@ -827,7 +827,7 @@
           <a:p>
             <a:fld id="{7077AFBB-1CF4-8544-90DC-1ED8B9AA61D3}" type="datetime1">
               <a:rPr lang="en-US" smtClean="0"/>
-              <a:t>9/21/2026</a:t>
+              <a:t>10/7/2026</a:t>
             </a:fld>
             <a:endParaRPr lang="en-US"/>
           </a:p>
@@ -1025,7 +1025,7 @@
           <a:p>
             <a:fld id="{1C00165F-9719-7745-8559-6A7EE2923027}" type="datetime1">
               <a:rPr lang="en-US" smtClean="0"/>
-              <a:t>9/21/2026</a:t>
+              <a:t>10/7/2026</a:t>
             </a:fld>
             <a:endParaRPr lang="en-US"/>
           </a:p>
@@ -1233,7 +1233,7 @@
           <a:p>
             <a:fld id="{4C6A8D55-FA0C-7D43-BAC0-BED15F1C12ED}" type="datetime1">
               <a:rPr lang="en-US" smtClean="0"/>
-              <a:t>9/21/2026</a:t>
+              <a:t>10/7/2026</a:t>
             </a:fld>
             <a:endParaRPr lang="en-US"/>
           </a:p>
@@ -1453,7 +1453,7 @@
           <a:p>
             <a:fld id="{7FA70553-0253-CE4B-B6C1-A630CB55C29D}" type="datetime1">
               <a:rPr lang="en-US" smtClean="0"/>
-              <a:t>9/21/2026</a:t>
+              <a:t>10/7/2026</a:t>
             </a:fld>
             <a:endParaRPr lang="en-US"/>
           </a:p>
@@ -1651,7 +1651,7 @@
           <a:p>
             <a:fld id="{105DE84E-69F4-FD40-ABD1-0EFAC22A12F3}" type="datetime1">
               <a:rPr lang="en-US" smtClean="0"/>
-              <a:t>9/21/2026</a:t>
+              <a:t>10/7/2026</a:t>
             </a:fld>
             <a:endParaRPr lang="en-US"/>
           </a:p>
@@ -1926,7 +1926,7 @@
           <a:p>
             <a:fld id="{10C0B3DB-0D9D-DD44-80C5-08109265E077}" type="datetime1">
               <a:rPr lang="en-US" smtClean="0"/>
-              <a:t>9/21/2026</a:t>
+              <a:t>10/7/2026</a:t>
             </a:fld>
             <a:endParaRPr lang="en-US"/>
           </a:p>
@@ -2191,7 +2191,7 @@
           <a:p>
             <a:fld id="{797EA869-A27D-C344-97D7-71199BBF260C}" type="datetime1">
               <a:rPr lang="en-US" smtClean="0"/>
-              <a:t>9/21/2026</a:t>
+              <a:t>10/7/2026</a:t>
             </a:fld>
             <a:endParaRPr lang="en-US"/>
           </a:p>
@@ -2603,7 +2603,7 @@
           <a:p>
             <a:fld id="{E7A15D25-E67F-1942-BBE6-90A232C6709A}" type="datetime1">
               <a:rPr lang="en-US" smtClean="0"/>
-              <a:t>9/21/2026</a:t>
+              <a:t>10/7/2026</a:t>
             </a:fld>
             <a:endParaRPr lang="en-US"/>
           </a:p>
@@ -2744,7 +2744,7 @@
           <a:p>
             <a:fld id="{CB2E0881-5289-1B49-8243-C7A7C2D761C1}" type="datetime1">
               <a:rPr lang="en-US" smtClean="0"/>
-              <a:t>9/21/2026</a:t>
+              <a:t>10/7/2026</a:t>
             </a:fld>
             <a:endParaRPr lang="en-US"/>
           </a:p>
@@ -2857,7 +2857,7 @@
           <a:p>
             <a:fld id="{BE289B97-0FAD-A54C-B1E0-81D6BDD23977}" type="datetime1">
               <a:rPr lang="en-US" smtClean="0"/>
-              <a:t>9/21/2026</a:t>
+              <a:t>10/7/2026</a:t>
             </a:fld>
             <a:endParaRPr lang="en-US"/>
           </a:p>
@@ -3168,7 +3168,7 @@
           <a:p>
             <a:fld id="{3CDAE13F-8788-6040-8DCF-36B10FE0117C}" type="datetime1">
               <a:rPr lang="en-US" smtClean="0"/>
-              <a:t>9/21/2026</a:t>
+              <a:t>10/7/2026</a:t>
             </a:fld>
             <a:endParaRPr lang="en-US"/>
           </a:p>
@@ -3381,7 +3381,7 @@
           <a:p>
             <a:fld id="{4553E244-3CAB-5240-928D-C4F781982911}" type="datetime1">
               <a:rPr lang="en-US" smtClean="0"/>
-              <a:t>9/21/2026</a:t>
+              <a:t>10/7/2026</a:t>
             </a:fld>
             <a:endParaRPr lang="en-US" dirty="0"/>
           </a:p>
@@ -3695,7 +3695,7 @@
           <a:p>
             <a:fld id="{8DA2BFAE-9CFE-3F4B-9BA6-76D3AD40298B}" type="datetime1">
               <a:rPr lang="en-US" smtClean="0"/>
-              <a:t>9/21/2026</a:t>
+              <a:t>10/7/2026</a:t>
             </a:fld>
             <a:endParaRPr lang="en-US"/>
           </a:p>
@@ -3893,7 +3893,7 @@
           <a:p>
             <a:fld id="{862BC747-2201-4149-89A6-B535544AC76E}" type="datetime1">
               <a:rPr lang="en-US" smtClean="0"/>
-              <a:t>9/21/2026</a:t>
+              <a:t>10/7/2026</a:t>
             </a:fld>
             <a:endParaRPr lang="en-US"/>
           </a:p>
@@ -4101,7 +4101,7 @@
           <a:p>
             <a:fld id="{2B6899FF-A9B6-EA4C-92F4-3B955917C48A}" type="datetime1">
               <a:rPr lang="en-US" smtClean="0"/>
-              <a:t>9/21/2026</a:t>
+              <a:t>10/7/2026</a:t>
             </a:fld>
             <a:endParaRPr lang="en-US"/>
           </a:p>
@@ -4376,7 +4376,7 @@
           <a:p>
             <a:fld id="{E433CC24-15E2-8440-82CF-DFE60D570E43}" type="datetime1">
               <a:rPr lang="en-US" smtClean="0"/>
-              <a:t>9/21/2026</a:t>
+              <a:t>10/7/2026</a:t>
             </a:fld>
             <a:endParaRPr lang="en-US"/>
           </a:p>
@@ -4641,7 +4641,7 @@
           <a:p>
             <a:fld id="{8DFE6C63-9089-6A49-BC6E-454A735346DF}" type="datetime1">
               <a:rPr lang="en-US" smtClean="0"/>
-              <a:t>9/21/2026</a:t>
+              <a:t>10/7/2026</a:t>
             </a:fld>
             <a:endParaRPr lang="en-US"/>
           </a:p>
@@ -5053,7 +5053,7 @@
           <a:p>
             <a:fld id="{3577C773-47BC-AB4F-9BFA-AB3DE15F2F0E}" type="datetime1">
               <a:rPr lang="en-US" smtClean="0"/>
-              <a:t>9/21/2026</a:t>
+              <a:t>10/7/2026</a:t>
             </a:fld>
             <a:endParaRPr lang="en-US"/>
           </a:p>
@@ -5194,7 +5194,7 @@
           <a:p>
             <a:fld id="{C5911242-D6ED-7442-B4D5-571BA5F763EC}" type="datetime1">
               <a:rPr lang="en-US" smtClean="0"/>
-              <a:t>9/21/2026</a:t>
+              <a:t>10/7/2026</a:t>
             </a:fld>
             <a:endParaRPr lang="en-US"/>
           </a:p>
@@ -5307,7 +5307,7 @@
           <a:p>
             <a:fld id="{53D49004-9440-C34D-AFCF-72D617EF0844}" type="datetime1">
               <a:rPr lang="en-US" smtClean="0"/>
-              <a:t>9/21/2026</a:t>
+              <a:t>10/7/2026</a:t>
             </a:fld>
             <a:endParaRPr lang="en-US"/>
           </a:p>
@@ -5618,7 +5618,7 @@
           <a:p>
             <a:fld id="{6CEC9C39-AF37-7048-A5F3-2138FC4EBAA9}" type="datetime1">
               <a:rPr lang="en-US" smtClean="0"/>
-              <a:t>9/21/2026</a:t>
+              <a:t>10/7/2026</a:t>
             </a:fld>
             <a:endParaRPr lang="en-US"/>
           </a:p>
@@ -5906,7 +5906,7 @@
           <a:p>
             <a:fld id="{8F9F80C6-6E15-BC44-A547-629E68A1897C}" type="datetime1">
               <a:rPr lang="en-US" smtClean="0"/>
-              <a:t>9/21/2026</a:t>
+              <a:t>10/7/2026</a:t>
             </a:fld>
             <a:endParaRPr lang="en-US"/>
           </a:p>
@@ -6147,7 +6147,7 @@
           <a:p>
             <a:fld id="{B1484145-EBBF-4546-953A-FE89B9B40A32}" type="datetime1">
               <a:rPr lang="en-US" smtClean="0"/>
-              <a:t>9/21/2026</a:t>
+              <a:t>10/7/2026</a:t>
             </a:fld>
             <a:endParaRPr lang="en-US"/>
           </a:p>
@@ -6835,7 +6835,7 @@
           <a:p>
             <a:fld id="{35187CD5-43F5-7F4F-8DF9-F56AF4D056AA}" type="datetime1">
               <a:rPr lang="en-US" smtClean="0"/>
-              <a:t>9/21/2026</a:t>
+              <a:t>10/7/2026</a:t>
             </a:fld>
             <a:endParaRPr lang="en-US"/>
           </a:p>
@@ -8147,7 +8147,7 @@
                           <a:rPr lang="en-US" i="1">
                             <a:latin typeface="Cambria Math" panose="02040503050406030204" pitchFamily="18" charset="0"/>
                           </a:rPr>
-                          <m:t>h</m:t>
+                          <m:t>ℎ</m:t>
                         </m:r>
                       </m:e>
                       <m:sub>
@@ -8237,7 +8237,7 @@
                           <a:rPr lang="en-US" i="1">
                             <a:latin typeface="Cambria Math" panose="02040503050406030204" pitchFamily="18" charset="0"/>
                           </a:rPr>
-                          <m:t>h</m:t>
+                          <m:t>ℎ</m:t>
                         </m:r>
                       </m:e>
                       <m:sub>
@@ -8382,7 +8382,7 @@
                           <a:rPr lang="en-US" i="1">
                             <a:latin typeface="Cambria Math" panose="02040503050406030204" pitchFamily="18" charset="0"/>
                           </a:rPr>
-                          <m:t>h</m:t>
+                          <m:t>ℎ</m:t>
                         </m:r>
                       </m:e>
                       <m:sub>
@@ -8432,7 +8432,7 @@
                           <a:rPr lang="en-US" i="1">
                             <a:latin typeface="Cambria Math" panose="02040503050406030204" pitchFamily="18" charset="0"/>
                           </a:rPr>
-                          <m:t>h</m:t>
+                          <m:t>ℎ</m:t>
                         </m:r>
                       </m:e>
                       <m:sub>
@@ -8495,7 +8495,7 @@
                     <m:func>
                       <m:funcPr>
                         <m:ctrlPr>
-                          <a:rPr lang="en-US" b="0" i="1" smtClean="0">
+                          <a:rPr lang="en-US" b="0" i="0" smtClean="0">
                             <a:latin typeface="Cambria Math" panose="02040503050406030204" pitchFamily="18" charset="0"/>
                           </a:rPr>
                         </m:ctrlPr>
@@ -8516,19 +8516,7 @@
                           <a:rPr lang="en-US" b="0" i="1" smtClean="0">
                             <a:latin typeface="Cambria Math" panose="02040503050406030204" pitchFamily="18" charset="0"/>
                           </a:rPr>
-                          <m:t>(</m:t>
-                        </m:r>
-                        <m:r>
-                          <a:rPr lang="en-US" b="0" i="1" smtClean="0">
-                            <a:latin typeface="Cambria Math" panose="02040503050406030204" pitchFamily="18" charset="0"/>
-                          </a:rPr>
-                          <m:t>0</m:t>
-                        </m:r>
-                        <m:r>
-                          <a:rPr lang="en-US" b="0" i="1" smtClean="0">
-                            <a:latin typeface="Cambria Math" panose="02040503050406030204" pitchFamily="18" charset="0"/>
-                          </a:rPr>
-                          <m:t>,</m:t>
+                          <m:t>(0,</m:t>
                         </m:r>
                         <m:sSub>
                           <m:sSubPr>
@@ -8558,7 +8546,7 @@
                         <m:func>
                           <m:funcPr>
                             <m:ctrlPr>
-                              <a:rPr lang="en-US" b="0" i="1" smtClean="0">
+                              <a:rPr lang="en-US" b="0" i="0" smtClean="0">
                                 <a:latin typeface="Cambria Math" panose="02040503050406030204" pitchFamily="18" charset="0"/>
                               </a:rPr>
                             </m:ctrlPr>
@@ -8579,19 +8567,7 @@
                               <a:rPr lang="en-US" b="0" i="1" smtClean="0">
                                 <a:latin typeface="Cambria Math" panose="02040503050406030204" pitchFamily="18" charset="0"/>
                               </a:rPr>
-                              <m:t>(</m:t>
-                            </m:r>
-                            <m:r>
-                              <a:rPr lang="en-US" b="0" i="1" smtClean="0">
-                                <a:latin typeface="Cambria Math" panose="02040503050406030204" pitchFamily="18" charset="0"/>
-                              </a:rPr>
-                              <m:t>0</m:t>
-                            </m:r>
-                            <m:r>
-                              <a:rPr lang="en-US" b="0" i="1" smtClean="0">
-                                <a:latin typeface="Cambria Math" panose="02040503050406030204" pitchFamily="18" charset="0"/>
-                              </a:rPr>
-                              <m:t>,</m:t>
+                              <m:t>(0,</m:t>
                             </m:r>
                             <m:sSub>
                               <m:sSubPr>
@@ -9183,7 +9159,7 @@
                         <m:func>
                           <m:funcPr>
                             <m:ctrlPr>
-                              <a:rPr lang="en-US" b="0" i="1" smtClean="0">
+                              <a:rPr lang="en-US" b="0" i="0" smtClean="0">
                                 <a:latin typeface="Cambria Math" panose="02040503050406030204" pitchFamily="18" charset="0"/>
                               </a:rPr>
                             </m:ctrlPr>
@@ -9279,7 +9255,7 @@
                             <m:func>
                               <m:funcPr>
                                 <m:ctrlPr>
-                                  <a:rPr lang="en-US" i="1">
+                                  <a:rPr lang="en-US">
                                     <a:latin typeface="Cambria Math" panose="02040503050406030204" pitchFamily="18" charset="0"/>
                                   </a:rPr>
                                 </m:ctrlPr>
@@ -9431,7 +9407,7 @@
                     <m:func>
                       <m:funcPr>
                         <m:ctrlPr>
-                          <a:rPr lang="en-US" b="0" i="1" smtClean="0">
+                          <a:rPr lang="en-US" b="0" i="0" smtClean="0">
                             <a:latin typeface="Cambria Math" panose="02040503050406030204" pitchFamily="18" charset="0"/>
                           </a:rPr>
                         </m:ctrlPr>
@@ -9485,7 +9461,7 @@
                                       <a:rPr lang="en-US" b="0" i="1" smtClean="0">
                                         <a:latin typeface="Cambria Math" panose="02040503050406030204" pitchFamily="18" charset="0"/>
                                       </a:rPr>
-                                      <m:t>h</m:t>
+                                      <m:t>ℎ</m:t>
                                     </m:r>
                                   </m:e>
                                   <m:sub>
@@ -9543,7 +9519,7 @@
                     <m:func>
                       <m:funcPr>
                         <m:ctrlPr>
-                          <a:rPr lang="en-US" i="1">
+                          <a:rPr lang="en-US">
                             <a:latin typeface="Cambria Math" panose="02040503050406030204" pitchFamily="18" charset="0"/>
                           </a:rPr>
                         </m:ctrlPr>
@@ -9581,7 +9557,7 @@
                                 <m:func>
                                   <m:funcPr>
                                     <m:ctrlPr>
-                                      <a:rPr lang="en-US" i="1">
+                                      <a:rPr lang="en-US">
                                         <a:latin typeface="Cambria Math" panose="02040503050406030204" pitchFamily="18" charset="0"/>
                                       </a:rPr>
                                     </m:ctrlPr>
@@ -9620,7 +9596,7 @@
                                               <a:rPr lang="en-US" i="1">
                                                 <a:latin typeface="Cambria Math" panose="02040503050406030204" pitchFamily="18" charset="0"/>
                                               </a:rPr>
-                                              <m:t>h</m:t>
+                                              <m:t>ℎ</m:t>
                                             </m:r>
                                           </m:e>
                                           <m:sub>
@@ -9713,7 +9689,7 @@
                                     <m:func>
                                       <m:funcPr>
                                         <m:ctrlPr>
-                                          <a:rPr lang="en-US" i="1">
+                                          <a:rPr lang="en-US">
                                             <a:latin typeface="Cambria Math" panose="02040503050406030204" pitchFamily="18" charset="0"/>
                                           </a:rPr>
                                         </m:ctrlPr>
@@ -9752,7 +9728,7 @@
                                                   <a:rPr lang="en-US" i="1">
                                                     <a:latin typeface="Cambria Math" panose="02040503050406030204" pitchFamily="18" charset="0"/>
                                                   </a:rPr>
-                                                  <m:t>h</m:t>
+                                                  <m:t>ℎ</m:t>
                                                 </m:r>
                                               </m:e>
                                               <m:sub>
@@ -9821,7 +9797,7 @@
                     <m:func>
                       <m:funcPr>
                         <m:ctrlPr>
-                          <a:rPr lang="en-US" i="1">
+                          <a:rPr lang="en-US">
                             <a:latin typeface="Cambria Math" panose="02040503050406030204" pitchFamily="18" charset="0"/>
                           </a:rPr>
                         </m:ctrlPr>
@@ -9841,7 +9817,7 @@
                         <m:d>
                           <m:dPr>
                             <m:ctrlPr>
-                              <a:rPr lang="en-US" i="1" smtClean="0">
+                              <a:rPr lang="en-US" i="1">
                                 <a:latin typeface="Cambria Math" panose="02040503050406030204" pitchFamily="18" charset="0"/>
                               </a:rPr>
                             </m:ctrlPr>
@@ -9886,7 +9862,7 @@
                                 <m:func>
                                   <m:funcPr>
                                     <m:ctrlPr>
-                                      <a:rPr lang="en-US" i="1">
+                                      <a:rPr lang="en-US">
                                         <a:latin typeface="Cambria Math" panose="02040503050406030204" pitchFamily="18" charset="0"/>
                                       </a:rPr>
                                     </m:ctrlPr>
@@ -9925,7 +9901,7 @@
                                               <a:rPr lang="en-US" i="1">
                                                 <a:latin typeface="Cambria Math" panose="02040503050406030204" pitchFamily="18" charset="0"/>
                                               </a:rPr>
-                                              <m:t>h</m:t>
+                                              <m:t>ℎ</m:t>
                                             </m:r>
                                           </m:e>
                                           <m:sub>
@@ -10002,7 +9978,7 @@
                           <a:rPr lang="en-US" i="1">
                             <a:latin typeface="Cambria Math" panose="02040503050406030204" pitchFamily="18" charset="0"/>
                           </a:rPr>
-                          <m:t>h</m:t>
+                          <m:t>ℎ</m:t>
                         </m:r>
                       </m:e>
                       <m:sub>
@@ -10093,7 +10069,7 @@
                               <a:rPr lang="en-US" i="1">
                                 <a:latin typeface="Cambria Math" panose="02040503050406030204" pitchFamily="18" charset="0"/>
                               </a:rPr>
-                              <m:t>h</m:t>
+                              <m:t>ℎ</m:t>
                             </m:r>
                           </m:e>
                           <m:sub>
@@ -10175,7 +10151,7 @@
                                   <a:rPr lang="en-US" i="1">
                                     <a:latin typeface="Cambria Math" panose="02040503050406030204" pitchFamily="18" charset="0"/>
                                   </a:rPr>
-                                  <m:t>h</m:t>
+                                  <m:t>ℎ</m:t>
                                 </m:r>
                               </m:e>
                               <m:sub>
@@ -10471,8 +10447,8 @@
           </a:p>
         </p:txBody>
       </p:sp>
-      <mc:AlternateContent xmlns:mc="http://schemas.openxmlformats.org/markup-compatibility/2006">
-        <mc:Choice xmlns:p14="http://schemas.microsoft.com/office/powerpoint/2010/main" Requires="p14">
+      <mc:AlternateContent xmlns:mc="http://schemas.openxmlformats.org/markup-compatibility/2006" xmlns:p14="http://schemas.microsoft.com/office/powerpoint/2010/main">
+        <mc:Choice Requires="p14">
           <p:contentPart p14:bwMode="auto" r:id="rId4">
             <p14:nvContentPartPr>
               <p14:cNvPr id="8" name="Ink 7">
@@ -10491,7 +10467,7 @@
             </p14:xfrm>
           </p:contentPart>
         </mc:Choice>
-        <mc:Fallback>
+        <mc:Fallback xmlns="">
           <p:pic>
             <p:nvPicPr>
               <p:cNvPr id="8" name="Ink 7">
@@ -10581,8 +10557,8 @@
           </a:p>
         </p:txBody>
       </p:sp>
-      <mc:AlternateContent xmlns:mc="http://schemas.openxmlformats.org/markup-compatibility/2006" xmlns:a14="http://schemas.microsoft.com/office/drawing/2010/main">
-        <mc:Choice Requires="a14">
+      <mc:AlternateContent xmlns:mc="http://schemas.openxmlformats.org/markup-compatibility/2006">
+        <mc:Choice xmlns:a14="http://schemas.microsoft.com/office/drawing/2010/main" Requires="a14">
           <p:sp>
             <p:nvSpPr>
               <p:cNvPr id="3" name="Content Placeholder 2">
@@ -10601,7 +10577,7 @@
             </p:nvSpPr>
             <p:spPr>
               <a:xfrm>
-                <a:off x="622737" y="1237592"/>
+                <a:off x="622737" y="1218342"/>
                 <a:ext cx="10949153" cy="3306125"/>
               </a:xfrm>
             </p:spPr>
@@ -10636,7 +10612,7 @@
                           <a:rPr lang="en-US" i="1">
                             <a:latin typeface="Cambria Math" panose="02040503050406030204" pitchFamily="18" charset="0"/>
                           </a:rPr>
-                          <m:t>h</m:t>
+                          <m:t>ℎ</m:t>
                         </m:r>
                       </m:e>
                       <m:sub>
@@ -10723,7 +10699,7 @@
                     <m:sSup>
                       <m:sSupPr>
                         <m:ctrlPr>
-                          <a:rPr lang="en-US" b="0" i="1" smtClean="0">
+                          <a:rPr lang="en-US" i="1">
                             <a:latin typeface="Cambria Math" panose="02040503050406030204" pitchFamily="18" charset="0"/>
                           </a:rPr>
                         </m:ctrlPr>
@@ -10868,7 +10844,7 @@
                     <m:sSup>
                       <m:sSupPr>
                         <m:ctrlPr>
-                          <a:rPr lang="en-US" b="0" i="1" smtClean="0">
+                          <a:rPr lang="en-US" i="1">
                             <a:latin typeface="Cambria Math" panose="02040503050406030204" pitchFamily="18" charset="0"/>
                           </a:rPr>
                         </m:ctrlPr>
@@ -10954,7 +10930,7 @@
                     <m:sSup>
                       <m:sSupPr>
                         <m:ctrlPr>
-                          <a:rPr lang="en-US" i="1">
+                          <a:rPr lang="en-US" i="1" smtClean="0">
                             <a:latin typeface="Cambria Math" panose="02040503050406030204" pitchFamily="18" charset="0"/>
                           </a:rPr>
                         </m:ctrlPr>
@@ -11026,18 +11002,32 @@
                         </m:r>
                       </m:sup>
                     </m:sSup>
+                    <m:r>
+                      <a:rPr lang="en-US" b="0" i="1" smtClean="0">
+                        <a:latin typeface="Cambria Math" panose="02040503050406030204" pitchFamily="18" charset="0"/>
+                      </a:rPr>
+                      <m:t>. </m:t>
+                    </m:r>
                   </m:oMath>
                 </a14:m>
                 <a:r>
                   <a:rPr lang="en-US" dirty="0"/>
-                  <a:t>, and the loss </a:t>
+                  <a:t>Loss </a:t>
+                </a:r>
+                <a:r>
+                  <a:rPr lang="en-US" dirty="0">
+                    <a:solidFill>
+                      <a:schemeClr val="tx1"/>
+                    </a:solidFill>
+                  </a:rPr>
+                  <a:t>= </a:t>
                 </a:r>
                 <a14:m>
                   <m:oMath xmlns:m="http://schemas.openxmlformats.org/officeDocument/2006/math">
                     <m:r>
                       <a:rPr lang="en-US" b="0" i="1" smtClean="0">
                         <a:solidFill>
-                          <a:srgbClr val="C00000"/>
+                          <a:schemeClr val="tx1"/>
                         </a:solidFill>
                         <a:latin typeface="Cambria Math" panose="02040503050406030204" pitchFamily="18" charset="0"/>
                       </a:rPr>
@@ -11048,31 +11038,77 @@
                         <m:ctrlPr>
                           <a:rPr lang="en-US" b="0" i="1" smtClean="0">
                             <a:solidFill>
-                              <a:srgbClr val="C00000"/>
+                              <a:schemeClr val="tx1"/>
                             </a:solidFill>
                             <a:latin typeface="Cambria Math" panose="02040503050406030204" pitchFamily="18" charset="0"/>
                           </a:rPr>
                         </m:ctrlPr>
                       </m:funcPr>
                       <m:fName>
+                        <m:sSub>
+                          <m:sSubPr>
+                            <m:ctrlPr>
+                              <a:rPr lang="en-US" b="0" i="0" smtClean="0">
+                                <a:solidFill>
+                                  <a:schemeClr val="tx1"/>
+                                </a:solidFill>
+                                <a:latin typeface="Cambria Math" panose="02040503050406030204" pitchFamily="18" charset="0"/>
+                              </a:rPr>
+                            </m:ctrlPr>
+                          </m:sSubPr>
+                          <m:e>
+                            <m:r>
+                              <m:rPr>
+                                <m:sty m:val="p"/>
+                              </m:rPr>
+                              <a:rPr lang="en-US" b="0" i="0" smtClean="0">
+                                <a:solidFill>
+                                  <a:schemeClr val="tx1"/>
+                                </a:solidFill>
+                                <a:latin typeface="Cambria Math" panose="02040503050406030204" pitchFamily="18" charset="0"/>
+                              </a:rPr>
+                              <m:t>lo</m:t>
+                            </m:r>
+                            <m:r>
+                              <m:rPr>
+                                <m:sty m:val="p"/>
+                              </m:rPr>
+                              <a:rPr lang="en-US" b="0" i="0" smtClean="0">
+                                <a:solidFill>
+                                  <a:schemeClr val="tx1"/>
+                                </a:solidFill>
+                                <a:latin typeface="Cambria Math" panose="02040503050406030204" pitchFamily="18" charset="0"/>
+                              </a:rPr>
+                              <m:t>g</m:t>
+                            </m:r>
+                          </m:e>
+                          <m:sub>
+                            <m:r>
+                              <a:rPr lang="en-US" b="0" i="1" smtClean="0">
+                                <a:solidFill>
+                                  <a:schemeClr val="tx1"/>
+                                </a:solidFill>
+                                <a:latin typeface="Cambria Math" panose="02040503050406030204" pitchFamily="18" charset="0"/>
+                              </a:rPr>
+                              <m:t>10</m:t>
+                            </m:r>
+                          </m:sub>
+                        </m:sSub>
                         <m:r>
-                          <m:rPr>
-                            <m:sty m:val="p"/>
-                          </m:rPr>
-                          <a:rPr lang="en-US" b="0" i="0" smtClean="0">
+                          <a:rPr lang="en-US" b="0" i="1" smtClean="0">
                             <a:solidFill>
-                              <a:srgbClr val="C00000"/>
+                              <a:schemeClr val="tx1"/>
                             </a:solidFill>
                             <a:latin typeface="Cambria Math" panose="02040503050406030204" pitchFamily="18" charset="0"/>
                           </a:rPr>
-                          <m:t>log</m:t>
+                          <m:t>0</m:t>
                         </m:r>
                       </m:fName>
                       <m:e>
                         <m:r>
                           <a:rPr lang="en-US" b="0" i="1" smtClean="0">
                             <a:solidFill>
-                              <a:srgbClr val="C00000"/>
+                              <a:schemeClr val="tx1"/>
                             </a:solidFill>
                             <a:latin typeface="Cambria Math" panose="02040503050406030204" pitchFamily="18" charset="0"/>
                           </a:rPr>
@@ -11080,6 +11116,15 @@
                         </m:r>
                       </m:e>
                     </m:func>
+                    <m:r>
+                      <a:rPr lang="en-US" b="0" i="1" smtClean="0">
+                        <a:solidFill>
+                          <a:schemeClr val="tx1"/>
+                        </a:solidFill>
+                        <a:latin typeface="Cambria Math" panose="02040503050406030204" pitchFamily="18" charset="0"/>
+                      </a:rPr>
+                      <m:t>=0.452</m:t>
+                    </m:r>
                   </m:oMath>
                 </a14:m>
                 <a:r>
@@ -11535,10 +11580,135 @@
                   <a:cs typeface="+mn-cs"/>
                 </a:endParaRPr>
               </a:p>
+              <a:p>
+                <a:pPr lvl="1"/>
+                <a:r>
+                  <a:rPr lang="en-US" sz="2100" dirty="0">
+                    <a:ea typeface="+mn-ea"/>
+                    <a:cs typeface="+mn-cs"/>
+                  </a:rPr>
+                  <a:t>We can set loss to </a:t>
+                </a:r>
+                <a:r>
+                  <a:rPr lang="en-US" sz="2100" dirty="0"/>
+                  <a:t>be either </a:t>
+                </a:r>
+                <a14:m>
+                  <m:oMath xmlns:m="http://schemas.openxmlformats.org/officeDocument/2006/math">
+                    <m:r>
+                      <a:rPr lang="en-US" altLang="zh-CN" sz="2100"/>
+                      <m:t>−</m:t>
+                    </m:r>
+                    <m:func>
+                      <m:funcPr>
+                        <m:ctrlPr>
+                          <a:rPr lang="en-US" altLang="zh-CN" sz="2100"/>
+                        </m:ctrlPr>
+                      </m:funcPr>
+                      <m:fName>
+                        <m:sSub>
+                          <m:sSubPr>
+                            <m:ctrlPr>
+                              <a:rPr lang="en-US" altLang="zh-CN" sz="2100"/>
+                            </m:ctrlPr>
+                          </m:sSubPr>
+                          <m:e>
+                            <m:r>
+                              <m:rPr>
+                                <m:sty m:val="p"/>
+                              </m:rPr>
+                              <a:rPr lang="en-US" altLang="zh-CN" sz="2100"/>
+                              <m:t>log</m:t>
+                            </m:r>
+                          </m:e>
+                          <m:sub>
+                            <m:r>
+                              <a:rPr lang="en-US" altLang="zh-CN" sz="2100"/>
+                              <m:t>10</m:t>
+                            </m:r>
+                          </m:sub>
+                        </m:sSub>
+                        <m:r>
+                          <a:rPr lang="en-US" altLang="zh-CN" sz="2100"/>
+                          <m:t>0</m:t>
+                        </m:r>
+                      </m:fName>
+                      <m:e>
+                        <m:r>
+                          <a:rPr lang="en-US" altLang="zh-CN" sz="2100"/>
+                          <m:t>.353</m:t>
+                        </m:r>
+                      </m:e>
+                    </m:func>
+                  </m:oMath>
+                </a14:m>
+                <a:r>
+                  <a:rPr lang="en-US" sz="2100" dirty="0"/>
+                  <a:t> or</a:t>
+                </a:r>
+                <a:r>
+                  <a:rPr lang="en-US" altLang="zh-CN" sz="2100" dirty="0"/>
+                  <a:t> </a:t>
+                </a:r>
+                <a14:m>
+                  <m:oMath xmlns:m="http://schemas.openxmlformats.org/officeDocument/2006/math">
+                    <m:r>
+                      <a:rPr lang="en-US" altLang="zh-CN" sz="2100"/>
+                      <m:t>−</m:t>
+                    </m:r>
+                    <m:func>
+                      <m:funcPr>
+                        <m:ctrlPr>
+                          <a:rPr lang="en-US" altLang="zh-CN" sz="2100"/>
+                        </m:ctrlPr>
+                      </m:funcPr>
+                      <m:fName>
+                        <m:sSub>
+                          <m:sSubPr>
+                            <m:ctrlPr>
+                              <a:rPr lang="en-US" altLang="zh-CN" sz="2100"/>
+                            </m:ctrlPr>
+                          </m:sSubPr>
+                          <m:e>
+                            <m:r>
+                              <m:rPr>
+                                <m:sty m:val="p"/>
+                              </m:rPr>
+                              <a:rPr lang="en-US" altLang="zh-CN" sz="2100"/>
+                              <m:t>log</m:t>
+                            </m:r>
+                          </m:e>
+                          <m:sub>
+                            <m:r>
+                              <a:rPr lang="en-US" altLang="zh-CN" sz="2100"/>
+                              <m:t>2</m:t>
+                            </m:r>
+                          </m:sub>
+                        </m:sSub>
+                        <m:r>
+                          <a:rPr lang="en-US" altLang="zh-CN" sz="2100"/>
+                          <m:t>0</m:t>
+                        </m:r>
+                      </m:fName>
+                      <m:e>
+                        <m:r>
+                          <a:rPr lang="en-US" altLang="zh-CN" sz="2100"/>
+                          <m:t>.353</m:t>
+                        </m:r>
+                      </m:e>
+                    </m:func>
+                  </m:oMath>
+                </a14:m>
+                <a:r>
+                  <a:rPr lang="en-US" altLang="zh-CN" sz="2100" dirty="0"/>
+                  <a:t>, the log base of 2 or 10 doe not matter as they differ by a constant multiplier </a:t>
+                </a:r>
+                <a:endParaRPr lang="en-US" sz="2100" dirty="0"/>
+              </a:p>
             </p:txBody>
           </p:sp>
         </mc:Choice>
-        <mc:Fallback xmlns="">
+        <mc:Fallback>
           <p:sp>
             <p:nvSpPr>
               <p:cNvPr id="3" name="Content Placeholder 2">
@@ -11557,7 +11727,7 @@
             </p:nvSpPr>
             <p:spPr>
               <a:xfrm>
-                <a:off x="622737" y="1237592"/>
+                <a:off x="622737" y="1218342"/>
                 <a:ext cx="10949153" cy="3306125"/>
               </a:xfrm>
               <a:blipFill>
@@ -11572,7 +11742,7 @@
               <a:lstStyle/>
               <a:p>
                 <a:r>
-                  <a:rPr lang="en-SE">
+                  <a:rPr lang="zh-CN" altLang="en-US">
                     <a:noFill/>
                   </a:rPr>
                   <a:t> </a:t>
@@ -11633,7 +11803,7 @@
         </p:blipFill>
         <p:spPr>
           <a:xfrm>
-            <a:off x="6313157" y="4065847"/>
+            <a:off x="6313157" y="4123597"/>
             <a:ext cx="3949616" cy="2080550"/>
           </a:xfrm>
           <a:prstGeom prst="rect">
@@ -11659,7 +11829,7 @@
         </p:nvCxnSpPr>
         <p:spPr bwMode="auto">
           <a:xfrm flipV="1">
-            <a:off x="5787420" y="5106122"/>
+            <a:off x="5787420" y="5163872"/>
             <a:ext cx="525737" cy="1"/>
           </a:xfrm>
           <a:prstGeom prst="straightConnector1">
@@ -11700,7 +11870,7 @@
         </p:blipFill>
         <p:spPr>
           <a:xfrm>
-            <a:off x="1706341" y="3828642"/>
+            <a:off x="1706341" y="3886392"/>
             <a:ext cx="4081079" cy="2554961"/>
           </a:xfrm>
           <a:prstGeom prst="rect">
@@ -11722,7 +11892,7 @@
         </p:nvSpPr>
         <p:spPr>
           <a:xfrm>
-            <a:off x="2816268" y="6384971"/>
+            <a:off x="2816268" y="6442721"/>
             <a:ext cx="2133600" cy="369332"/>
           </a:xfrm>
           <a:prstGeom prst="rect">
@@ -11758,7 +11928,7 @@
         </p:nvSpPr>
         <p:spPr>
           <a:xfrm>
-            <a:off x="7643101" y="6383603"/>
+            <a:off x="7643101" y="6441353"/>
             <a:ext cx="1800200" cy="369332"/>
           </a:xfrm>
           <a:prstGeom prst="rect">
@@ -11794,7 +11964,7 @@
         </p:nvSpPr>
         <p:spPr bwMode="auto">
           <a:xfrm>
-            <a:off x="8879965" y="5444490"/>
+            <a:off x="8879965" y="5502240"/>
             <a:ext cx="563336" cy="547007"/>
           </a:xfrm>
           <a:prstGeom prst="rect">
@@ -11863,7 +12033,7 @@
         </p:nvSpPr>
         <p:spPr>
           <a:xfrm>
-            <a:off x="9437742" y="5484172"/>
+            <a:off x="9437742" y="5541922"/>
             <a:ext cx="870751" cy="584775"/>
           </a:xfrm>
           <a:prstGeom prst="rect">
@@ -12246,10 +12416,7 @@
                 <a:pPr/>
                 <a14:m>
                   <m:oMathPara xmlns:m="http://schemas.openxmlformats.org/officeDocument/2006/math">
-                    <m:oMathParaPr>
-                      <m:jc m:val="centerGroup"/>
-                    </m:oMathParaPr>
-                    <m:oMath xmlns:m="http://schemas.openxmlformats.org/officeDocument/2006/math">
+                    <m:oMath>
                       <m:r>
                         <a:rPr lang="en-US" sz="1600" b="0" i="1" dirty="0" smtClean="0">
                           <a:latin typeface="Cambria Math" panose="02040503050406030204" pitchFamily="18" charset="0"/>
@@ -12288,10 +12455,7 @@
                 <a:pPr/>
                 <a14:m>
                   <m:oMathPara xmlns:m="http://schemas.openxmlformats.org/officeDocument/2006/math">
-                    <m:oMathParaPr>
-                      <m:jc m:val="centerGroup"/>
-                    </m:oMathParaPr>
-                    <m:oMath xmlns:m="http://schemas.openxmlformats.org/officeDocument/2006/math">
+                    <m:oMath>
                       <m:r>
                         <a:rPr lang="en-US" sz="1600" b="0" i="1" dirty="0" smtClean="0">
                           <a:latin typeface="Cambria Math" panose="02040503050406030204" pitchFamily="18" charset="0"/>
@@ -12330,10 +12494,7 @@
                 <a:pPr/>
                 <a14:m>
                   <m:oMathPara xmlns:m="http://schemas.openxmlformats.org/officeDocument/2006/math">
-                    <m:oMathParaPr>
-                      <m:jc m:val="centerGroup"/>
-                    </m:oMathParaPr>
-                    <m:oMath xmlns:m="http://schemas.openxmlformats.org/officeDocument/2006/math">
+                    <m:oMath>
                       <m:r>
                         <a:rPr lang="en-US" sz="1600" b="0" i="1" dirty="0" smtClean="0">
                           <a:latin typeface="Cambria Math" panose="02040503050406030204" pitchFamily="18" charset="0"/>
@@ -12372,10 +12533,7 @@
                 <a:pPr/>
                 <a14:m>
                   <m:oMathPara xmlns:m="http://schemas.openxmlformats.org/officeDocument/2006/math">
-                    <m:oMathParaPr>
-                      <m:jc m:val="centerGroup"/>
-                    </m:oMathParaPr>
-                    <m:oMath xmlns:m="http://schemas.openxmlformats.org/officeDocument/2006/math">
+                    <m:oMath>
                       <m:r>
                         <a:rPr lang="en-US" sz="1600" b="0" i="1" dirty="0" smtClean="0">
                           <a:latin typeface="Cambria Math" panose="02040503050406030204" pitchFamily="18" charset="0"/>
@@ -12414,10 +12572,7 @@
                 <a:pPr/>
                 <a14:m>
                   <m:oMathPara xmlns:m="http://schemas.openxmlformats.org/officeDocument/2006/math">
-                    <m:oMathParaPr>
-                      <m:jc m:val="centerGroup"/>
-                    </m:oMathParaPr>
-                    <m:oMath xmlns:m="http://schemas.openxmlformats.org/officeDocument/2006/math">
+                    <m:oMath>
                       <m:r>
                         <a:rPr lang="en-US" sz="1600" b="0" i="1" dirty="0" smtClean="0">
                           <a:latin typeface="Cambria Math" panose="02040503050406030204" pitchFamily="18" charset="0"/>
@@ -12456,10 +12611,7 @@
                 <a:pPr/>
                 <a14:m>
                   <m:oMathPara xmlns:m="http://schemas.openxmlformats.org/officeDocument/2006/math">
-                    <m:oMathParaPr>
-                      <m:jc m:val="centerGroup"/>
-                    </m:oMathParaPr>
-                    <m:oMath xmlns:m="http://schemas.openxmlformats.org/officeDocument/2006/math">
+                    <m:oMath>
                       <m:r>
                         <a:rPr lang="en-US" sz="1600" b="0" i="1" dirty="0" smtClean="0">
                           <a:latin typeface="Cambria Math" panose="02040503050406030204" pitchFamily="18" charset="0"/>
@@ -12498,10 +12650,7 @@
                 <a:pPr/>
                 <a14:m>
                   <m:oMathPara xmlns:m="http://schemas.openxmlformats.org/officeDocument/2006/math">
-                    <m:oMathParaPr>
-                      <m:jc m:val="centerGroup"/>
-                    </m:oMathParaPr>
-                    <m:oMath xmlns:m="http://schemas.openxmlformats.org/officeDocument/2006/math">
+                    <m:oMath>
                       <m:r>
                         <a:rPr lang="en-US" sz="1600" b="0" i="1" dirty="0" smtClean="0">
                           <a:latin typeface="Cambria Math" panose="02040503050406030204" pitchFamily="18" charset="0"/>
@@ -12540,10 +12689,7 @@
                 <a:pPr/>
                 <a14:m>
                   <m:oMathPara xmlns:m="http://schemas.openxmlformats.org/officeDocument/2006/math">
-                    <m:oMathParaPr>
-                      <m:jc m:val="centerGroup"/>
-                    </m:oMathParaPr>
-                    <m:oMath xmlns:m="http://schemas.openxmlformats.org/officeDocument/2006/math">
+                    <m:oMath>
                       <m:r>
                         <a:rPr lang="en-US" sz="1600" b="0" i="1" dirty="0" smtClean="0">
                           <a:latin typeface="Cambria Math" panose="02040503050406030204" pitchFamily="18" charset="0"/>
@@ -12582,10 +12728,7 @@
                 <a:pPr/>
                 <a14:m>
                   <m:oMathPara xmlns:m="http://schemas.openxmlformats.org/officeDocument/2006/math">
-                    <m:oMathParaPr>
-                      <m:jc m:val="centerGroup"/>
-                    </m:oMathParaPr>
-                    <m:oMath xmlns:m="http://schemas.openxmlformats.org/officeDocument/2006/math">
+                    <m:oMath>
                       <m:r>
                         <a:rPr lang="en-US" sz="1600" b="0" i="1" dirty="0" smtClean="0">
                           <a:solidFill>
@@ -12640,10 +12783,7 @@
                 <a:pPr/>
                 <a14:m>
                   <m:oMathPara xmlns:m="http://schemas.openxmlformats.org/officeDocument/2006/math">
-                    <m:oMathParaPr>
-                      <m:jc m:val="centerGroup"/>
-                    </m:oMathParaPr>
-                    <m:oMath xmlns:m="http://schemas.openxmlformats.org/officeDocument/2006/math">
+                    <m:oMath>
                       <m:r>
                         <a:rPr lang="en-US" sz="1600" b="0" i="1" dirty="0" smtClean="0">
                           <a:latin typeface="Cambria Math" panose="02040503050406030204" pitchFamily="18" charset="0"/>
@@ -13343,7 +13483,7 @@
             </a:r>
             <a:r>
               <a:rPr lang="en-US" dirty="0" err="1"/>
-              <a:t>conswider</a:t>
+              <a:t>consider</a:t>
             </a:r>
             <a:r>
               <a:rPr lang="en-US" dirty="0"/>
@@ -13871,7 +14011,7 @@
                 <a:pPr lvl="1"/>
                 <a:r>
                   <a:rPr lang="en-US" dirty="0"/>
-                  <a:t>Among all the positive cases, the classier correctly classifies 33.3% of them as positive</a:t>
+                  <a:t>Among all the positive cases, the classifier correctly classifies 33.3% of them as positive</a:t>
                 </a:r>
               </a:p>
               <a:p>
@@ -13892,7 +14032,7 @@
                     <m:f>
                       <m:fPr>
                         <m:ctrlPr>
-                          <a:rPr lang="en-US" i="1">
+                          <a:rPr lang="en-US" i="0">
                             <a:latin typeface="Cambria Math" panose="02040503050406030204" pitchFamily="18" charset="0"/>
                           </a:rPr>
                         </m:ctrlPr>
@@ -13927,7 +14067,7 @@
                         <m:d>
                           <m:dPr>
                             <m:ctrlPr>
-                              <a:rPr lang="en-US" i="1">
+                              <a:rPr lang="en-US" i="0">
                                 <a:latin typeface="Cambria Math" panose="02040503050406030204" pitchFamily="18" charset="0"/>
                               </a:rPr>
                             </m:ctrlPr>
@@ -14103,7 +14243,7 @@
                 <a:pPr lvl="1"/>
                 <a:r>
                   <a:rPr lang="en-US" dirty="0"/>
-                  <a:t>Among all the negative cases, the classier misclassifies 7.2% of them as positive</a:t>
+                  <a:t>Among all the negative cases, the classifier misclassifies 7.2% of them as positive</a:t>
                 </a:r>
               </a:p>
               <a:p>
@@ -14231,7 +14371,7 @@
                 <a:pPr lvl="1"/>
                 <a:r>
                   <a:rPr lang="en-US" dirty="0"/>
-                  <a:t>The classifier makes the correct prediction 91% percent of the time</a:t>
+                  <a:t>The classifier makes the correct prediction 91% of the time</a:t>
                 </a:r>
               </a:p>
               <a:p>
@@ -15000,7 +15140,7 @@
                 <a:pPr lvl="1"/>
                 <a:r>
                   <a:rPr lang="en-US" dirty="0"/>
-                  <a:t>Among all the positive cases, the classier correctly classifies 0% of them as positive</a:t>
+                  <a:t>Among all the positive cases, the classifier correctly classifies 0% of them as positive</a:t>
                 </a:r>
               </a:p>
               <a:p>
@@ -15098,7 +15238,7 @@
                 <a:pPr lvl="1"/>
                 <a:r>
                   <a:rPr lang="en-US" dirty="0"/>
-                  <a:t>Among all the negative cases, the classier misclassifies 0% of them as positive</a:t>
+                  <a:t>Among all the negative cases, the classifier misclassifies 0% of them as positive</a:t>
                 </a:r>
               </a:p>
               <a:p>
@@ -15240,7 +15380,7 @@
                 </a:r>
                 <a:r>
                   <a:rPr lang="en-US" kern="0" dirty="0"/>
-                  <a:t> makes the correct prediction 97% percent of the time</a:t>
+                  <a:t> makes the correct prediction 97% of the time</a:t>
                 </a:r>
               </a:p>
               <a:p>
@@ -15817,7 +15957,7 @@
                       <a:rPr lang="en-US" b="0" i="1" smtClean="0">
                         <a:latin typeface="Cambria Math" panose="02040503050406030204" pitchFamily="18" charset="0"/>
                       </a:rPr>
-                      <m:t>𝑅𝑂𝐶</m:t>
+                      <m:t>𝐴𝑈𝐶</m:t>
                     </m:r>
                     <m:r>
                       <a:rPr lang="en-US" b="0" i="1" smtClean="0">
@@ -18417,7 +18557,7 @@
                       <a:pPr algn="ctr"/>
                       <a:r>
                         <a:rPr lang="en-US" sz="1400" dirty="0"/>
-                        <a:t>Pos</a:t>
+                        <a:t>Neg</a:t>
                       </a:r>
                       <a:endParaRPr lang="en-SE" sz="1400" dirty="0"/>
                     </a:p>
@@ -18501,7 +18641,7 @@
                       <a:pPr algn="ctr"/>
                       <a:r>
                         <a:rPr lang="en-US" sz="1400" dirty="0"/>
-                        <a:t>Neg</a:t>
+                        <a:t>Pos</a:t>
                       </a:r>
                       <a:endParaRPr lang="en-SE" sz="1400" dirty="0"/>
                     </a:p>
@@ -20584,10 +20724,7 @@
                   <a:pPr algn="l"/>
                   <a14:m>
                     <m:oMathPara xmlns:m="http://schemas.openxmlformats.org/officeDocument/2006/math">
-                      <m:oMathParaPr>
-                        <m:jc m:val="centerGroup"/>
-                      </m:oMathParaPr>
-                      <m:oMath xmlns:m="http://schemas.openxmlformats.org/officeDocument/2006/math">
+                      <m:oMath>
                         <m:r>
                           <a:rPr lang="en-US" b="1" i="1" smtClean="0">
                             <a:latin typeface="Cambria Math" panose="02040503050406030204" pitchFamily="18" charset="0"/>
@@ -20680,10 +20817,7 @@
                   <a:pPr algn="l"/>
                   <a14:m>
                     <m:oMathPara xmlns:m="http://schemas.openxmlformats.org/officeDocument/2006/math">
-                      <m:oMathParaPr>
-                        <m:jc m:val="centerGroup"/>
-                      </m:oMathParaPr>
-                      <m:oMath xmlns:m="http://schemas.openxmlformats.org/officeDocument/2006/math">
+                      <m:oMath>
                         <m:r>
                           <a:rPr lang="en-US" b="0" i="1" smtClean="0">
                             <a:latin typeface="Cambria Math" panose="02040503050406030204" pitchFamily="18" charset="0"/>
@@ -20776,10 +20910,7 @@
                   <a:pPr algn="l"/>
                   <a14:m>
                     <m:oMathPara xmlns:m="http://schemas.openxmlformats.org/officeDocument/2006/math">
-                      <m:oMathParaPr>
-                        <m:jc m:val="centerGroup"/>
-                      </m:oMathParaPr>
-                      <m:oMath xmlns:m="http://schemas.openxmlformats.org/officeDocument/2006/math">
+                      <m:oMath>
                         <m:r>
                           <a:rPr lang="en-US" b="1" i="1" smtClean="0">
                             <a:latin typeface="Cambria Math" panose="02040503050406030204" pitchFamily="18" charset="0"/>
@@ -20946,10 +21077,7 @@
                   <a:pPr/>
                   <a14:m>
                     <m:oMathPara xmlns:m="http://schemas.openxmlformats.org/officeDocument/2006/math">
-                      <m:oMathParaPr>
-                        <m:jc m:val="centerGroup"/>
-                      </m:oMathParaPr>
-                      <m:oMath xmlns:m="http://schemas.openxmlformats.org/officeDocument/2006/math">
+                      <m:oMath>
                         <m:r>
                           <a:rPr lang="en-US" b="1" i="1">
                             <a:latin typeface="Cambria Math" panose="02040503050406030204" pitchFamily="18" charset="0"/>
@@ -21413,10 +21541,7 @@
                     <a:pPr/>
                     <a14:m>
                       <m:oMathPara xmlns:m="http://schemas.openxmlformats.org/officeDocument/2006/math">
-                        <m:oMathParaPr>
-                          <m:jc m:val="centerGroup"/>
-                        </m:oMathParaPr>
-                        <m:oMath xmlns:m="http://schemas.openxmlformats.org/officeDocument/2006/math">
+                        <m:oMath>
                           <m:r>
                             <a:rPr lang="en-US" b="0" i="1">
                               <a:latin typeface="Cambria Math" panose="02040503050406030204" pitchFamily="18" charset="0"/>
@@ -21536,10 +21661,7 @@
                     <a:pPr/>
                     <a14:m>
                       <m:oMathPara xmlns:m="http://schemas.openxmlformats.org/officeDocument/2006/math">
-                        <m:oMathParaPr>
-                          <m:jc m:val="centerGroup"/>
-                        </m:oMathParaPr>
-                        <m:oMath xmlns:m="http://schemas.openxmlformats.org/officeDocument/2006/math">
+                        <m:oMath>
                           <m:r>
                             <a:rPr lang="en-US" b="0" i="1" smtClean="0">
                               <a:latin typeface="Cambria Math" panose="02040503050406030204" pitchFamily="18" charset="0"/>
@@ -21659,10 +21781,7 @@
                     <a:pPr/>
                     <a14:m>
                       <m:oMathPara xmlns:m="http://schemas.openxmlformats.org/officeDocument/2006/math">
-                        <m:oMathParaPr>
-                          <m:jc m:val="centerGroup"/>
-                        </m:oMathParaPr>
-                        <m:oMath xmlns:m="http://schemas.openxmlformats.org/officeDocument/2006/math">
+                        <m:oMath>
                           <m:r>
                             <a:rPr lang="en-US" b="0" i="1" smtClean="0">
                               <a:latin typeface="Cambria Math" panose="02040503050406030204" pitchFamily="18" charset="0"/>
@@ -21782,10 +21901,7 @@
                     <a:pPr/>
                     <a14:m>
                       <m:oMathPara xmlns:m="http://schemas.openxmlformats.org/officeDocument/2006/math">
-                        <m:oMathParaPr>
-                          <m:jc m:val="centerGroup"/>
-                        </m:oMathParaPr>
-                        <m:oMath xmlns:m="http://schemas.openxmlformats.org/officeDocument/2006/math">
+                        <m:oMath>
                           <m:r>
                             <a:rPr lang="en-US" b="0" i="1" smtClean="0">
                               <a:latin typeface="Cambria Math" panose="02040503050406030204" pitchFamily="18" charset="0"/>
@@ -21947,10 +22063,7 @@
                     <a:pPr algn="ctr"/>
                     <a14:m>
                       <m:oMathPara xmlns:m="http://schemas.openxmlformats.org/officeDocument/2006/math">
-                        <m:oMathParaPr>
-                          <m:jc m:val="centerGroup"/>
-                        </m:oMathParaPr>
-                        <m:oMath xmlns:m="http://schemas.openxmlformats.org/officeDocument/2006/math">
+                        <m:oMath>
                           <m:r>
                             <a:rPr lang="en-US" sz="1600" b="0" i="1" smtClean="0">
                               <a:latin typeface="Cambria Math" panose="02040503050406030204" pitchFamily="18" charset="0"/>
@@ -21990,10 +22103,7 @@
                     <a:pPr algn="ctr"/>
                     <a14:m>
                       <m:oMathPara xmlns:m="http://schemas.openxmlformats.org/officeDocument/2006/math">
-                        <m:oMathParaPr>
-                          <m:jc m:val="centerGroup"/>
-                        </m:oMathParaPr>
-                        <m:oMath xmlns:m="http://schemas.openxmlformats.org/officeDocument/2006/math">
+                        <m:oMath>
                           <m:r>
                             <a:rPr lang="en-US" sz="1600" b="0" i="1" smtClean="0">
                               <a:latin typeface="Cambria Math" panose="02040503050406030204" pitchFamily="18" charset="0"/>
@@ -22468,7 +22578,7 @@
                     <m:sSub>
                       <m:sSubPr>
                         <m:ctrlPr>
-                          <a:rPr lang="en-US" b="0" i="1" smtClean="0">
+                          <a:rPr lang="en-US" b="0" i="0" smtClean="0">
                             <a:solidFill>
                               <a:schemeClr val="tx1"/>
                             </a:solidFill>
@@ -22830,10 +22940,7 @@
                   <a:pPr/>
                   <a14:m>
                     <m:oMathPara xmlns:m="http://schemas.openxmlformats.org/officeDocument/2006/math">
-                      <m:oMathParaPr>
-                        <m:jc m:val="centerGroup"/>
-                      </m:oMathParaPr>
-                      <m:oMath xmlns:m="http://schemas.openxmlformats.org/officeDocument/2006/math">
+                      <m:oMath>
                         <m:sSub>
                           <m:sSubPr>
                             <m:ctrlPr>
@@ -23240,7 +23347,7 @@
             <a:pPr lvl="1"/>
             <a:r>
               <a:rPr lang="en-US" dirty="0"/>
-              <a:t>More advanced GD methods exploit momentum, e.g., Nesterov, </a:t>
+              <a:t>More advanced GD methods exploit momentum and/or adaptive learning rates, e.g., Nesterov, </a:t>
             </a:r>
             <a:r>
               <a:rPr lang="en-US" dirty="0" err="1"/>
@@ -23693,10 +23800,7 @@
                 </a:pPr>
                 <a14:m>
                   <m:oMathPara xmlns:m="http://schemas.openxmlformats.org/officeDocument/2006/math">
-                    <m:oMathParaPr>
-                      <m:jc m:val="centerGroup"/>
-                    </m:oMathParaPr>
-                    <m:oMath xmlns:m="http://schemas.openxmlformats.org/officeDocument/2006/math">
+                    <m:oMath>
                       <m:sSub>
                         <m:sSubPr>
                           <m:ctrlPr>
@@ -23920,10 +24024,7 @@
                 </a:pPr>
                 <a14:m>
                   <m:oMathPara xmlns:m="http://schemas.openxmlformats.org/officeDocument/2006/math">
-                    <m:oMathParaPr>
-                      <m:jc m:val="centerGroup"/>
-                    </m:oMathParaPr>
-                    <m:oMath xmlns:m="http://schemas.openxmlformats.org/officeDocument/2006/math">
+                    <m:oMath>
                       <m:sSub>
                         <m:sSubPr>
                           <m:ctrlPr>
@@ -24041,10 +24142,7 @@
                 <a:pPr/>
                 <a14:m>
                   <m:oMathPara xmlns:m="http://schemas.openxmlformats.org/officeDocument/2006/math">
-                    <m:oMathParaPr>
-                      <m:jc m:val="centerGroup"/>
-                    </m:oMathParaPr>
-                    <m:oMath xmlns:m="http://schemas.openxmlformats.org/officeDocument/2006/math">
+                    <m:oMath>
                       <m:r>
                         <a:rPr lang="en-US" i="1" smtClean="0">
                           <a:latin typeface="Cambria Math" panose="02040503050406030204" pitchFamily="18" charset="0"/>
@@ -26695,8 +26793,8 @@
           </a:p>
         </p:txBody>
       </p:sp>
-      <mc:AlternateContent xmlns:mc="http://schemas.openxmlformats.org/markup-compatibility/2006">
-        <mc:Choice xmlns:a14="http://schemas.microsoft.com/office/drawing/2010/main" Requires="a14">
+      <mc:AlternateContent xmlns:mc="http://schemas.openxmlformats.org/markup-compatibility/2006" xmlns:a14="http://schemas.microsoft.com/office/drawing/2010/main">
+        <mc:Choice Requires="a14">
           <p:sp>
             <p:nvSpPr>
               <p:cNvPr id="3" name="Content Placeholder 2">
@@ -26946,7 +27044,7 @@
             </p:txBody>
           </p:sp>
         </mc:Choice>
-        <mc:Fallback>
+        <mc:Fallback xmlns="">
           <p:sp>
             <p:nvSpPr>
               <p:cNvPr id="3" name="Content Placeholder 2">
@@ -28562,7 +28660,7 @@
                     <m:sSup>
                       <m:sSupPr>
                         <m:ctrlPr>
-                          <a:rPr lang="en-US" b="1" i="1" dirty="0" smtClean="0">
+                          <a:rPr lang="en-US" i="1" dirty="0" smtClean="0">
                             <a:latin typeface="Cambria Math" panose="02040503050406030204" pitchFamily="18" charset="0"/>
                           </a:rPr>
                         </m:ctrlPr>
@@ -28573,7 +28671,7 @@
                             <m:begChr m:val="["/>
                             <m:endChr m:val="]"/>
                             <m:ctrlPr>
-                              <a:rPr lang="en-US" i="1" dirty="0" smtClean="0">
+                              <a:rPr lang="en-US" b="0" i="1" dirty="0" smtClean="0">
                                 <a:latin typeface="Cambria Math" panose="02040503050406030204" pitchFamily="18" charset="0"/>
                               </a:rPr>
                             </m:ctrlPr>
@@ -31141,10 +31239,7 @@
                           <a:pPr/>
                           <a14:m>
                             <m:oMathPara xmlns:m="http://schemas.openxmlformats.org/officeDocument/2006/math">
-                              <m:oMathParaPr>
-                                <m:jc m:val="centerGroup"/>
-                              </m:oMathParaPr>
-                              <m:oMath xmlns:m="http://schemas.openxmlformats.org/officeDocument/2006/math">
+                              <m:oMath>
                                 <m:sSub>
                                   <m:sSubPr>
                                     <m:ctrlPr>
@@ -31199,10 +31294,7 @@
                           <a:pPr/>
                           <a14:m>
                             <m:oMathPara xmlns:m="http://schemas.openxmlformats.org/officeDocument/2006/math">
-                              <m:oMathParaPr>
-                                <m:jc m:val="centerGroup"/>
-                              </m:oMathParaPr>
-                              <m:oMath xmlns:m="http://schemas.openxmlformats.org/officeDocument/2006/math">
+                              <m:oMath>
                                 <m:sSub>
                                   <m:sSubPr>
                                     <m:ctrlPr>
@@ -31257,10 +31349,7 @@
                           <a:pPr/>
                           <a14:m>
                             <m:oMathPara xmlns:m="http://schemas.openxmlformats.org/officeDocument/2006/math">
-                              <m:oMathParaPr>
-                                <m:jc m:val="centerGroup"/>
-                              </m:oMathParaPr>
-                              <m:oMath xmlns:m="http://schemas.openxmlformats.org/officeDocument/2006/math">
+                              <m:oMath>
                                 <m:r>
                                   <a:rPr lang="en-US" sz="1900" b="1" i="1" smtClean="0">
                                     <a:solidFill>
@@ -31297,10 +31386,7 @@
                           <a:pPr/>
                           <a14:m>
                             <m:oMathPara xmlns:m="http://schemas.openxmlformats.org/officeDocument/2006/math">
-                              <m:oMathParaPr>
-                                <m:jc m:val="centerGroup"/>
-                              </m:oMathParaPr>
-                              <m:oMath xmlns:m="http://schemas.openxmlformats.org/officeDocument/2006/math">
+                              <m:oMath>
                                 <m:r>
                                   <a:rPr lang="en-US" sz="1900" b="0" i="1" smtClean="0">
                                     <a:latin typeface="Cambria Math" panose="02040503050406030204" pitchFamily="18" charset="0"/>
@@ -31323,10 +31409,7 @@
                           <a:pPr/>
                           <a14:m>
                             <m:oMathPara xmlns:m="http://schemas.openxmlformats.org/officeDocument/2006/math">
-                              <m:oMathParaPr>
-                                <m:jc m:val="centerGroup"/>
-                              </m:oMathParaPr>
-                              <m:oMath xmlns:m="http://schemas.openxmlformats.org/officeDocument/2006/math">
+                              <m:oMath>
                                 <m:r>
                                   <a:rPr lang="en-US" sz="1900" b="0" i="1" smtClean="0">
                                     <a:latin typeface="Cambria Math" panose="02040503050406030204" pitchFamily="18" charset="0"/>
@@ -31349,10 +31432,7 @@
                           <a:pPr/>
                           <a14:m>
                             <m:oMathPara xmlns:m="http://schemas.openxmlformats.org/officeDocument/2006/math">
-                              <m:oMathParaPr>
-                                <m:jc m:val="centerGroup"/>
-                              </m:oMathParaPr>
-                              <m:oMath xmlns:m="http://schemas.openxmlformats.org/officeDocument/2006/math">
+                              <m:oMath>
                                 <m:r>
                                   <a:rPr lang="en-US" sz="1900" b="0" i="1" smtClean="0">
                                     <a:latin typeface="Cambria Math" panose="02040503050406030204" pitchFamily="18" charset="0"/>
@@ -31382,10 +31462,7 @@
                           <a:pPr/>
                           <a14:m>
                             <m:oMathPara xmlns:m="http://schemas.openxmlformats.org/officeDocument/2006/math">
-                              <m:oMathParaPr>
-                                <m:jc m:val="centerGroup"/>
-                              </m:oMathParaPr>
-                              <m:oMath xmlns:m="http://schemas.openxmlformats.org/officeDocument/2006/math">
+                              <m:oMath>
                                 <m:r>
                                   <a:rPr lang="en-US" sz="1900" b="0" i="1" smtClean="0">
                                     <a:latin typeface="Cambria Math" panose="02040503050406030204" pitchFamily="18" charset="0"/>
@@ -31408,10 +31485,7 @@
                           <a:pPr/>
                           <a14:m>
                             <m:oMathPara xmlns:m="http://schemas.openxmlformats.org/officeDocument/2006/math">
-                              <m:oMathParaPr>
-                                <m:jc m:val="centerGroup"/>
-                              </m:oMathParaPr>
-                              <m:oMath xmlns:m="http://schemas.openxmlformats.org/officeDocument/2006/math">
+                              <m:oMath>
                                 <m:r>
                                   <a:rPr lang="en-US" sz="1900" b="0" i="1" smtClean="0">
                                     <a:latin typeface="Cambria Math" panose="02040503050406030204" pitchFamily="18" charset="0"/>
@@ -31434,10 +31508,7 @@
                           <a:pPr/>
                           <a14:m>
                             <m:oMathPara xmlns:m="http://schemas.openxmlformats.org/officeDocument/2006/math">
-                              <m:oMathParaPr>
-                                <m:jc m:val="centerGroup"/>
-                              </m:oMathParaPr>
-                              <m:oMath xmlns:m="http://schemas.openxmlformats.org/officeDocument/2006/math">
+                              <m:oMath>
                                 <m:r>
                                   <a:rPr lang="en-US" sz="1900" b="0" i="1" smtClean="0">
                                     <a:latin typeface="Cambria Math" panose="02040503050406030204" pitchFamily="18" charset="0"/>
@@ -31467,10 +31538,7 @@
                           <a:pPr/>
                           <a14:m>
                             <m:oMathPara xmlns:m="http://schemas.openxmlformats.org/officeDocument/2006/math">
-                              <m:oMathParaPr>
-                                <m:jc m:val="centerGroup"/>
-                              </m:oMathParaPr>
-                              <m:oMath xmlns:m="http://schemas.openxmlformats.org/officeDocument/2006/math">
+                              <m:oMath>
                                 <m:r>
                                   <a:rPr lang="en-US" sz="1900" b="0" i="1" smtClean="0">
                                     <a:latin typeface="Cambria Math" panose="02040503050406030204" pitchFamily="18" charset="0"/>
@@ -31493,10 +31561,7 @@
                           <a:pPr/>
                           <a14:m>
                             <m:oMathPara xmlns:m="http://schemas.openxmlformats.org/officeDocument/2006/math">
-                              <m:oMathParaPr>
-                                <m:jc m:val="centerGroup"/>
-                              </m:oMathParaPr>
-                              <m:oMath xmlns:m="http://schemas.openxmlformats.org/officeDocument/2006/math">
+                              <m:oMath>
                                 <m:r>
                                   <a:rPr lang="en-US" sz="1900" b="0" i="1" smtClean="0">
                                     <a:latin typeface="Cambria Math" panose="02040503050406030204" pitchFamily="18" charset="0"/>
@@ -31519,10 +31584,7 @@
                           <a:pPr/>
                           <a14:m>
                             <m:oMathPara xmlns:m="http://schemas.openxmlformats.org/officeDocument/2006/math">
-                              <m:oMathParaPr>
-                                <m:jc m:val="centerGroup"/>
-                              </m:oMathParaPr>
-                              <m:oMath xmlns:m="http://schemas.openxmlformats.org/officeDocument/2006/math">
+                              <m:oMath>
                                 <m:r>
                                   <a:rPr lang="en-US" sz="1900" b="0" i="1" smtClean="0">
                                     <a:latin typeface="Cambria Math" panose="02040503050406030204" pitchFamily="18" charset="0"/>
@@ -31552,10 +31614,7 @@
                           <a:pPr/>
                           <a14:m>
                             <m:oMathPara xmlns:m="http://schemas.openxmlformats.org/officeDocument/2006/math">
-                              <m:oMathParaPr>
-                                <m:jc m:val="centerGroup"/>
-                              </m:oMathParaPr>
-                              <m:oMath xmlns:m="http://schemas.openxmlformats.org/officeDocument/2006/math">
+                              <m:oMath>
                                 <m:r>
                                   <a:rPr lang="en-US" sz="1900" b="0" i="1" smtClean="0">
                                     <a:latin typeface="Cambria Math" panose="02040503050406030204" pitchFamily="18" charset="0"/>
@@ -31578,10 +31637,7 @@
                           <a:pPr/>
                           <a14:m>
                             <m:oMathPara xmlns:m="http://schemas.openxmlformats.org/officeDocument/2006/math">
-                              <m:oMathParaPr>
-                                <m:jc m:val="centerGroup"/>
-                              </m:oMathParaPr>
-                              <m:oMath xmlns:m="http://schemas.openxmlformats.org/officeDocument/2006/math">
+                              <m:oMath>
                                 <m:r>
                                   <a:rPr lang="en-US" sz="1900" b="0" i="1" smtClean="0">
                                     <a:latin typeface="Cambria Math" panose="02040503050406030204" pitchFamily="18" charset="0"/>
@@ -31604,10 +31660,7 @@
                           <a:pPr/>
                           <a14:m>
                             <m:oMathPara xmlns:m="http://schemas.openxmlformats.org/officeDocument/2006/math">
-                              <m:oMathParaPr>
-                                <m:jc m:val="centerGroup"/>
-                              </m:oMathParaPr>
-                              <m:oMath xmlns:m="http://schemas.openxmlformats.org/officeDocument/2006/math">
+                              <m:oMath>
                                 <m:r>
                                   <a:rPr lang="en-US" sz="1900" b="0" i="1" smtClean="0">
                                     <a:latin typeface="Cambria Math" panose="02040503050406030204" pitchFamily="18" charset="0"/>
@@ -32882,15 +32935,6 @@
 </file>
 
 <file path=customXml/item1.xml><?xml version="1.0" encoding="utf-8"?>
-<p:properties xmlns:p="http://schemas.microsoft.com/office/2006/metadata/properties" xmlns:xsi="http://www.w3.org/2001/XMLSchema-instance" xmlns:pc="http://schemas.microsoft.com/office/infopath/2007/PartnerControls">
-  <documentManagement>
-    <_ip_UnifiedCompliancePolicyUIAction xmlns="http://schemas.microsoft.com/sharepoint/v3" xsi:nil="true"/>
-    <_ip_UnifiedCompliancePolicyProperties xmlns="http://schemas.microsoft.com/sharepoint/v3" xsi:nil="true"/>
-  </documentManagement>
-</p:properties>
-</file>
-
-<file path=customXml/item2.xml><?xml version="1.0" encoding="utf-8"?>
 <ct:contentTypeSchema xmlns:ct="http://schemas.microsoft.com/office/2006/metadata/contentType" xmlns:ma="http://schemas.microsoft.com/office/2006/metadata/properties/metaAttributes" ct:_="" ma:_="" ma:contentTypeName="Document" ma:contentTypeID="0x0101000DB1CA95448E8341BAC02D84F836706E" ma:contentTypeVersion="6" ma:contentTypeDescription="Create a new document." ma:contentTypeScope="" ma:versionID="2327688fe12e390352dabca167932040">
   <xsd:schema xmlns:xsd="http://www.w3.org/2001/XMLSchema" xmlns:xs="http://www.w3.org/2001/XMLSchema" xmlns:p="http://schemas.microsoft.com/office/2006/metadata/properties" xmlns:ns1="http://schemas.microsoft.com/sharepoint/v3" xmlns:ns2="1b5a303a-3c2d-46af-894d-5a63675fdf5d" xmlns:ns3="13bd0950-6268-4383-96fe-5fe3a48110ec" targetNamespace="http://schemas.microsoft.com/office/2006/metadata/properties" ma:root="true" ma:fieldsID="e90c3ecbaea61ae9ab22f72bf2f79284" ns1:_="" ns2:_="" ns3:_="">
     <xsd:import namespace="http://schemas.microsoft.com/sharepoint/v3"/>
@@ -33072,6 +33116,15 @@
 </ct:contentTypeSchema>
 </file>
 
+<file path=customXml/item2.xml><?xml version="1.0" encoding="utf-8"?>
+<p:properties xmlns:p="http://schemas.microsoft.com/office/2006/metadata/properties" xmlns:xsi="http://www.w3.org/2001/XMLSchema-instance" xmlns:pc="http://schemas.microsoft.com/office/infopath/2007/PartnerControls">
+  <documentManagement>
+    <_ip_UnifiedCompliancePolicyUIAction xmlns="http://schemas.microsoft.com/sharepoint/v3" xsi:nil="true"/>
+    <_ip_UnifiedCompliancePolicyProperties xmlns="http://schemas.microsoft.com/sharepoint/v3" xsi:nil="true"/>
+  </documentManagement>
+</p:properties>
+</file>
+
 <file path=customXml/item3.xml><?xml version="1.0" encoding="utf-8"?>
 <?mso-contentType ?>
 <FormTemplates xmlns="http://schemas.microsoft.com/sharepoint/v3/contenttype/forms">
@@ -33082,24 +33135,6 @@
 </file>
 
 <file path=customXml/itemProps1.xml><?xml version="1.0" encoding="utf-8"?>
-<ds:datastoreItem xmlns:ds="http://schemas.openxmlformats.org/officeDocument/2006/customXml" ds:itemID="{4642294E-F67E-4944-9A87-D5C631307A05}">
-  <ds:schemaRefs>
-    <ds:schemaRef ds:uri="13bd0950-6268-4383-96fe-5fe3a48110ec"/>
-    <ds:schemaRef ds:uri="1b5a303a-3c2d-46af-894d-5a63675fdf5d"/>
-    <ds:schemaRef ds:uri="http://purl.org/dc/dcmitype/"/>
-    <ds:schemaRef ds:uri="http://purl.org/dc/elements/1.1/"/>
-    <ds:schemaRef ds:uri="http://purl.org/dc/terms/"/>
-    <ds:schemaRef ds:uri="http://schemas.microsoft.com/office/2006/documentManagement/types"/>
-    <ds:schemaRef ds:uri="http://schemas.microsoft.com/office/2006/metadata/properties"/>
-    <ds:schemaRef ds:uri="http://schemas.microsoft.com/office/infopath/2007/PartnerControls"/>
-    <ds:schemaRef ds:uri="http://schemas.microsoft.com/sharepoint/v3"/>
-    <ds:schemaRef ds:uri="http://schemas.openxmlformats.org/package/2006/metadata/core-properties"/>
-    <ds:schemaRef ds:uri="http://www.w3.org/XML/1998/namespace"/>
-  </ds:schemaRefs>
-</ds:datastoreItem>
-</file>
-
-<file path=customXml/itemProps2.xml><?xml version="1.0" encoding="utf-8"?>
 <ds:datastoreItem xmlns:ds="http://schemas.openxmlformats.org/officeDocument/2006/customXml" ds:itemID="{68A2820C-4060-44E8-B56E-83EBBB666E7B}">
   <ds:schemaRefs>
     <ds:schemaRef ds:uri="13bd0950-6268-4383-96fe-5fe3a48110ec"/>
@@ -33119,6 +33154,24 @@
 </ds:datastoreItem>
 </file>
 
+<file path=customXml/itemProps2.xml><?xml version="1.0" encoding="utf-8"?>
+<ds:datastoreItem xmlns:ds="http://schemas.openxmlformats.org/officeDocument/2006/customXml" ds:itemID="{4642294E-F67E-4944-9A87-D5C631307A05}">
+  <ds:schemaRefs>
+    <ds:schemaRef ds:uri="13bd0950-6268-4383-96fe-5fe3a48110ec"/>
+    <ds:schemaRef ds:uri="1b5a303a-3c2d-46af-894d-5a63675fdf5d"/>
+    <ds:schemaRef ds:uri="http://purl.org/dc/dcmitype/"/>
+    <ds:schemaRef ds:uri="http://purl.org/dc/elements/1.1/"/>
+    <ds:schemaRef ds:uri="http://purl.org/dc/terms/"/>
+    <ds:schemaRef ds:uri="http://schemas.microsoft.com/office/2006/documentManagement/types"/>
+    <ds:schemaRef ds:uri="http://schemas.microsoft.com/office/2006/metadata/properties"/>
+    <ds:schemaRef ds:uri="http://schemas.microsoft.com/office/infopath/2007/PartnerControls"/>
+    <ds:schemaRef ds:uri="http://schemas.microsoft.com/sharepoint/v3"/>
+    <ds:schemaRef ds:uri="http://schemas.openxmlformats.org/package/2006/metadata/core-properties"/>
+    <ds:schemaRef ds:uri="http://www.w3.org/XML/1998/namespace"/>
+  </ds:schemaRefs>
+</ds:datastoreItem>
+</file>
+
 <file path=customXml/itemProps3.xml><?xml version="1.0" encoding="utf-8"?>
 <ds:datastoreItem xmlns:ds="http://schemas.openxmlformats.org/officeDocument/2006/customXml" ds:itemID="{AC991D47-3926-48A1-8BC1-320FB99AB8DB}">
   <ds:schemaRefs>
